--- a/automation/reel-template-pack/halloween/h2-batty-about/carousel/Template h2 - Things I'm batty about - Carousel.pptx
+++ b/automation/reel-template-pack/halloween/h2-batty-about/carousel/Template h2 - Things I'm batty about - Carousel.pptx
@@ -3887,33 +3887,34 @@
           </a:prstGeom>
         </p:spPr>
       </p:pic>
-      <p:pic>
-        <p:nvPicPr>
-          <p:cNvPr id="3" name="PHOTO: Opening photo (fills the page)" descr="001.png"/>
-          <p:cNvPicPr>
-            <a:picLocks noChangeAspect="1"/>
-          </p:cNvPicPr>
+      <p:sp>
+        <p:nvSpPr>
+          <p:cNvPr id="3" name="PHOTO: Opening photo (fills the page)"/>
+          <p:cNvSpPr/>
           <p:nvPr/>
-        </p:nvPicPr>
-        <p:blipFill>
-          <a:blip r:embed="rId3"/>
-          <a:stretch>
-            <a:fillRect/>
-          </a:stretch>
-        </p:blipFill>
+        </p:nvSpPr>
         <p:spPr>
-          <a:xfrm>
+          <a:xfrm rot="0">
             <a:off x="0" y="0"/>
             <a:ext cx="10287000" cy="13716000"/>
           </a:xfrm>
           <a:prstGeom prst="rect">
             <a:avLst/>
           </a:prstGeom>
+          <a:blipFill rotWithShape="1">
+            <a:blip r:embed="rId3"/>
+            <a:stretch>
+              <a:fillRect/>
+            </a:stretch>
+          </a:blipFill>
+          <a:ln>
+            <a:noFill/>
+          </a:ln>
         </p:spPr>
-      </p:pic>
+      </p:sp>
       <p:pic>
         <p:nvPicPr>
-          <p:cNvPr id="4" name="bat" descr="002.png"/>
+          <p:cNvPr id="4" name="bat" descr="001.png"/>
           <p:cNvPicPr>
             <a:picLocks noChangeAspect="1"/>
           </p:cNvPicPr>
@@ -3937,7 +3938,7 @@
       </p:pic>
       <p:pic>
         <p:nvPicPr>
-          <p:cNvPr id="5" name="bat" descr="003.png"/>
+          <p:cNvPr id="5" name="bat" descr="002.png"/>
           <p:cNvPicPr>
             <a:picLocks noChangeAspect="1"/>
           </p:cNvPicPr>
@@ -3961,7 +3962,7 @@
       </p:pic>
       <p:pic>
         <p:nvPicPr>
-          <p:cNvPr id="6" name="bat" descr="004.png"/>
+          <p:cNvPr id="6" name="bat" descr="003.png"/>
           <p:cNvPicPr>
             <a:picLocks noChangeAspect="1"/>
           </p:cNvPicPr>
@@ -3985,7 +3986,7 @@
       </p:pic>
       <p:pic>
         <p:nvPicPr>
-          <p:cNvPr id="7" name="bat" descr="005.png"/>
+          <p:cNvPr id="7" name="bat" descr="004.png"/>
           <p:cNvPicPr>
             <a:picLocks noChangeAspect="1"/>
           </p:cNvPicPr>
@@ -4009,7 +4010,7 @@
       </p:pic>
       <p:pic>
         <p:nvPicPr>
-          <p:cNvPr id="8" name="bat" descr="006.png"/>
+          <p:cNvPr id="8" name="bat" descr="005.png"/>
           <p:cNvPicPr>
             <a:picLocks noChangeAspect="1"/>
           </p:cNvPicPr>
@@ -4033,7 +4034,7 @@
       </p:pic>
       <p:pic>
         <p:nvPicPr>
-          <p:cNvPr id="9" name="bat" descr="007.png"/>
+          <p:cNvPr id="9" name="bat" descr="006.png"/>
           <p:cNvPicPr>
             <a:picLocks noChangeAspect="1"/>
           </p:cNvPicPr>
@@ -4114,7 +4115,7 @@
       </p:sp>
       <p:pic>
         <p:nvPicPr>
-          <p:cNvPr id="11" name="BATTY" descr="008.png"/>
+          <p:cNvPr id="11" name="BATTY" descr="007.png"/>
           <p:cNvPicPr>
             <a:picLocks noChangeAspect="1"/>
           </p:cNvPicPr>
@@ -4138,7 +4139,7 @@
       </p:pic>
       <p:pic>
         <p:nvPicPr>
-          <p:cNvPr id="12" name="about" descr="009.png"/>
+          <p:cNvPr id="12" name="about" descr="008.png"/>
           <p:cNvPicPr>
             <a:picLocks noChangeAspect="1"/>
           </p:cNvPicPr>
@@ -4261,7 +4262,7 @@
       </p:pic>
       <p:pic>
         <p:nvPicPr>
-          <p:cNvPr id="3" name="branch" descr="010.png"/>
+          <p:cNvPr id="3" name="branch" descr="009.png"/>
           <p:cNvPicPr>
             <a:picLocks noChangeAspect="1"/>
           </p:cNvPicPr>
@@ -4285,7 +4286,7 @@
       </p:pic>
       <p:pic>
         <p:nvPicPr>
-          <p:cNvPr id="4" name="hanging bat" descr="011.png"/>
+          <p:cNvPr id="4" name="hanging bat" descr="010.png"/>
           <p:cNvPicPr>
             <a:picLocks noChangeAspect="1"/>
           </p:cNvPicPr>
@@ -4309,7 +4310,7 @@
       </p:pic>
       <p:pic>
         <p:nvPicPr>
-          <p:cNvPr id="5" name="TOP 3" descr="012.png"/>
+          <p:cNvPr id="5" name="TOP 3" descr="011.png"/>
           <p:cNvPicPr>
             <a:picLocks noChangeAspect="1"/>
           </p:cNvPicPr>
@@ -4461,30 +4462,152 @@
           </a:p>
         </p:txBody>
       </p:sp>
-      <p:pic>
-        <p:nvPicPr>
-          <p:cNvPr id="8" name="arrow" descr="013.png"/>
-          <p:cNvPicPr>
-            <a:picLocks noChangeAspect="1"/>
-          </p:cNvPicPr>
+      <p:sp>
+        <p:nvSpPr>
+          <p:cNvPr id="8" name="arrow"/>
+          <p:cNvSpPr/>
           <p:nvPr/>
-        </p:nvPicPr>
-        <p:blipFill>
-          <a:blip r:embed="rId6"/>
-          <a:stretch>
-            <a:fillRect/>
-          </a:stretch>
-        </p:blipFill>
+        </p:nvSpPr>
         <p:spPr>
-          <a:xfrm rot="120000">
+          <a:xfrm rot="-120000">
             <a:off x="6048375" y="12082462"/>
             <a:ext cx="1619250" cy="504825"/>
           </a:xfrm>
-          <a:prstGeom prst="rect">
+          <a:custGeom>
             <a:avLst/>
-          </a:prstGeom>
+            <a:gdLst/>
+            <a:ahLst/>
+            <a:cxnLst/>
+            <a:rect l="0" t="0" r="r" b="b"/>
+            <a:pathLst>
+              <a:path w="1619250" h="504825">
+                <a:moveTo>
+                  <a:pt x="1257300" y="480450"/>
+                </a:moveTo>
+                <a:cubicBezTo>
+                  <a:pt x="1257300" y="466626"/>
+                  <a:pt x="1253177" y="458623"/>
+                  <a:pt x="1247775" y="461962"/>
+                </a:cubicBezTo>
+                <a:cubicBezTo>
+                  <a:pt x="1242536" y="465200"/>
+                  <a:pt x="1238235" y="460095"/>
+                  <a:pt x="1238218" y="450618"/>
+                </a:cubicBezTo>
+                <a:cubicBezTo>
+                  <a:pt x="1238201" y="441141"/>
+                  <a:pt x="1271222" y="402197"/>
+                  <a:pt x="1311598" y="364076"/>
+                </a:cubicBezTo>
+                <a:lnTo>
+                  <a:pt x="1385010" y="294765"/>
+                </a:lnTo>
+                <a:lnTo>
+                  <a:pt x="1266386" y="300090"/>
+                </a:lnTo>
+                <a:cubicBezTo>
+                  <a:pt x="1201143" y="303019"/>
+                  <a:pt x="950595" y="310034"/>
+                  <a:pt x="709612" y="315678"/>
+                </a:cubicBezTo>
+                <a:cubicBezTo>
+                  <a:pt x="468630" y="321323"/>
+                  <a:pt x="223235" y="328686"/>
+                  <a:pt x="164292" y="332039"/>
+                </a:cubicBezTo>
+                <a:cubicBezTo>
+                  <a:pt x="81649" y="336741"/>
+                  <a:pt x="57124" y="335412"/>
+                  <a:pt x="57135" y="326231"/>
+                </a:cubicBezTo>
+                <a:cubicBezTo>
+                  <a:pt x="57144" y="319190"/>
+                  <a:pt x="44728" y="314325"/>
+                  <a:pt x="26754" y="314324"/>
+                </a:cubicBezTo>
+                <a:cubicBezTo>
+                  <a:pt x="-1225" y="314324"/>
+                  <a:pt x="-2231" y="313294"/>
+                  <a:pt x="14096" y="301355"/>
+                </a:cubicBezTo>
+                <a:cubicBezTo>
+                  <a:pt x="39698" y="282634"/>
+                  <a:pt x="40970" y="257174"/>
+                  <a:pt x="16302" y="257175"/>
+                </a:cubicBezTo>
+                <a:cubicBezTo>
+                  <a:pt x="4858" y="257175"/>
+                  <a:pt x="89" y="253819"/>
+                  <a:pt x="5238" y="249388"/>
+                </a:cubicBezTo>
+                <a:cubicBezTo>
+                  <a:pt x="38131" y="221084"/>
+                  <a:pt x="254251" y="205225"/>
+                  <a:pt x="757237" y="194206"/>
+                </a:cubicBezTo>
+                <a:cubicBezTo>
+                  <a:pt x="909161" y="190878"/>
+                  <a:pt x="1109402" y="185468"/>
+                  <a:pt x="1202217" y="182184"/>
+                </a:cubicBezTo>
+                <a:lnTo>
+                  <a:pt x="1370973" y="176212"/>
+                </a:lnTo>
+                <a:lnTo>
+                  <a:pt x="1306992" y="128587"/>
+                </a:lnTo>
+                <a:cubicBezTo>
+                  <a:pt x="1271803" y="102393"/>
+                  <a:pt x="1242899" y="74533"/>
+                  <a:pt x="1242760" y="66675"/>
+                </a:cubicBezTo>
+                <a:cubicBezTo>
+                  <a:pt x="1242622" y="58816"/>
+                  <a:pt x="1239154" y="47029"/>
+                  <a:pt x="1235054" y="40481"/>
+                </a:cubicBezTo>
+                <a:cubicBezTo>
+                  <a:pt x="1224885" y="24237"/>
+                  <a:pt x="1235722" y="9152"/>
+                  <a:pt x="1252842" y="15722"/>
+                </a:cubicBezTo>
+                <a:cubicBezTo>
+                  <a:pt x="1260532" y="18673"/>
+                  <a:pt x="1266825" y="16343"/>
+                  <a:pt x="1266825" y="10544"/>
+                </a:cubicBezTo>
+                <a:cubicBezTo>
+                  <a:pt x="1266825" y="-9201"/>
+                  <a:pt x="1283898" y="-5"/>
+                  <a:pt x="1441695" y="104733"/>
+                </a:cubicBezTo>
+                <a:cubicBezTo>
+                  <a:pt x="1620939" y="223706"/>
+                  <a:pt x="1633427" y="237454"/>
+                  <a:pt x="1593675" y="272033"/>
+                </a:cubicBezTo>
+                <a:cubicBezTo>
+                  <a:pt x="1563065" y="298659"/>
+                  <a:pt x="1336730" y="468567"/>
+                  <a:pt x="1320437" y="477150"/>
+                </a:cubicBezTo>
+                <a:cubicBezTo>
+                  <a:pt x="1255250" y="511492"/>
+                  <a:pt x="1257300" y="511385"/>
+                  <a:pt x="1257300" y="480450"/>
+                </a:cubicBezTo>
+                <a:close/>
+              </a:path>
+            </a:pathLst>
+          </a:custGeom>
+          <a:solidFill>
+            <a:srgbClr val="CEACD6"/>
+          </a:solidFill>
+          <a:ln>
+            <a:noFill/>
+          </a:ln>
         </p:spPr>
-      </p:pic>
+      </p:sp>
     </p:spTree>
   </p:cSld>
   <p:clrMapOvr>
@@ -4529,7 +4652,7 @@
       </p:pic>
       <p:pic>
         <p:nvPicPr>
-          <p:cNvPr id="3" name="photo border" descr="014.png"/>
+          <p:cNvPr id="3" name="photo border" descr="012.png"/>
           <p:cNvPicPr>
             <a:picLocks noChangeAspect="1"/>
           </p:cNvPicPr>
@@ -4551,33 +4674,34 @@
           </a:prstGeom>
         </p:spPr>
       </p:pic>
-      <p:pic>
-        <p:nvPicPr>
-          <p:cNvPr id="4" name="PHOTO: Favourite 1" descr="015.png"/>
-          <p:cNvPicPr>
-            <a:picLocks noChangeAspect="1"/>
-          </p:cNvPicPr>
+      <p:sp>
+        <p:nvSpPr>
+          <p:cNvPr id="4" name="PHOTO: Favourite 1"/>
+          <p:cNvSpPr/>
           <p:nvPr/>
-        </p:nvPicPr>
-        <p:blipFill>
-          <a:blip r:embed="rId4"/>
-          <a:stretch>
-            <a:fillRect/>
-          </a:stretch>
-        </p:blipFill>
+        </p:nvSpPr>
         <p:spPr>
-          <a:xfrm rot="120000">
+          <a:xfrm rot="-120000">
             <a:off x="1714500" y="2571750"/>
             <a:ext cx="7239000" cy="8191500"/>
           </a:xfrm>
           <a:prstGeom prst="rect">
             <a:avLst/>
           </a:prstGeom>
+          <a:blipFill rotWithShape="1">
+            <a:blip r:embed="rId4"/>
+            <a:stretch>
+              <a:fillRect/>
+            </a:stretch>
+          </a:blipFill>
+          <a:ln>
+            <a:noFill/>
+          </a:ln>
         </p:spPr>
-      </p:pic>
+      </p:sp>
       <p:pic>
         <p:nvPicPr>
-          <p:cNvPr id="5" name="1" descr="016.png"/>
+          <p:cNvPr id="5" name="1" descr="013.png"/>
           <p:cNvPicPr>
             <a:picLocks noChangeAspect="1"/>
           </p:cNvPicPr>
@@ -4599,9 +4723,889 @@
           </a:prstGeom>
         </p:spPr>
       </p:pic>
+      <p:sp>
+        <p:nvSpPr>
+          <p:cNvPr id="6" name="crown"/>
+          <p:cNvSpPr/>
+          <p:nvPr/>
+        </p:nvSpPr>
+        <p:spPr>
+          <a:xfrm rot="600000">
+            <a:off x="7429500" y="1433512"/>
+            <a:ext cx="1905000" cy="1895475"/>
+          </a:xfrm>
+          <a:custGeom>
+            <a:avLst/>
+            <a:gdLst/>
+            <a:ahLst/>
+            <a:cxnLst/>
+            <a:rect l="0" t="0" r="r" b="b"/>
+            <a:pathLst>
+              <a:path w="1905000" h="1895475">
+                <a:moveTo>
+                  <a:pt x="419100" y="1888868"/>
+                </a:moveTo>
+                <a:cubicBezTo>
+                  <a:pt x="348264" y="1877568"/>
+                  <a:pt x="294827" y="1854146"/>
+                  <a:pt x="289258" y="1831957"/>
+                </a:cubicBezTo>
+                <a:cubicBezTo>
+                  <a:pt x="286123" y="1819467"/>
+                  <a:pt x="275112" y="1804727"/>
+                  <a:pt x="264788" y="1799202"/>
+                </a:cubicBezTo>
+                <a:cubicBezTo>
+                  <a:pt x="254464" y="1793677"/>
+                  <a:pt x="248491" y="1786683"/>
+                  <a:pt x="251514" y="1783660"/>
+                </a:cubicBezTo>
+                <a:cubicBezTo>
+                  <a:pt x="254536" y="1780638"/>
+                  <a:pt x="252491" y="1772720"/>
+                  <a:pt x="246968" y="1766066"/>
+                </a:cubicBezTo>
+                <a:cubicBezTo>
+                  <a:pt x="230815" y="1746603"/>
+                  <a:pt x="262413" y="1697570"/>
+                  <a:pt x="309396" y="1669191"/>
+                </a:cubicBezTo>
+                <a:lnTo>
+                  <a:pt x="351029" y="1644043"/>
+                </a:lnTo>
+                <a:lnTo>
+                  <a:pt x="332644" y="1618223"/>
+                </a:lnTo>
+                <a:cubicBezTo>
+                  <a:pt x="314018" y="1592066"/>
+                  <a:pt x="270230" y="1394934"/>
+                  <a:pt x="261560" y="1298205"/>
+                </a:cubicBezTo>
+                <a:cubicBezTo>
+                  <a:pt x="260055" y="1281412"/>
+                  <a:pt x="255744" y="1262690"/>
+                  <a:pt x="251980" y="1256600"/>
+                </a:cubicBezTo>
+                <a:cubicBezTo>
+                  <a:pt x="235525" y="1229976"/>
+                  <a:pt x="229935" y="1179574"/>
+                  <a:pt x="244037" y="1184985"/>
+                </a:cubicBezTo>
+                <a:cubicBezTo>
+                  <a:pt x="255362" y="1189331"/>
+                  <a:pt x="256758" y="1181486"/>
+                  <a:pt x="251969" y="1140436"/>
+                </a:cubicBezTo>
+                <a:cubicBezTo>
+                  <a:pt x="244106" y="1073044"/>
+                  <a:pt x="228616" y="1032894"/>
+                  <a:pt x="216882" y="1049488"/>
+                </a:cubicBezTo>
+                <a:cubicBezTo>
+                  <a:pt x="210942" y="1057889"/>
+                  <a:pt x="209898" y="1053378"/>
+                  <a:pt x="213723" y="1035843"/>
+                </a:cubicBezTo>
+                <a:cubicBezTo>
+                  <a:pt x="216866" y="1021437"/>
+                  <a:pt x="215569" y="1009649"/>
+                  <a:pt x="210841" y="1009650"/>
+                </a:cubicBezTo>
+                <a:cubicBezTo>
+                  <a:pt x="199399" y="1009650"/>
+                  <a:pt x="190829" y="962945"/>
+                  <a:pt x="201107" y="956593"/>
+                </a:cubicBezTo>
+                <a:cubicBezTo>
+                  <a:pt x="205536" y="953856"/>
+                  <a:pt x="205352" y="944314"/>
+                  <a:pt x="200698" y="935389"/>
+                </a:cubicBezTo>
+                <a:cubicBezTo>
+                  <a:pt x="196044" y="926464"/>
+                  <a:pt x="187280" y="884872"/>
+                  <a:pt x="181223" y="842962"/>
+                </a:cubicBezTo>
+                <a:cubicBezTo>
+                  <a:pt x="175166" y="801052"/>
+                  <a:pt x="168674" y="758190"/>
+                  <a:pt x="166796" y="747712"/>
+                </a:cubicBezTo>
+                <a:cubicBezTo>
+                  <a:pt x="164918" y="737235"/>
+                  <a:pt x="163054" y="719582"/>
+                  <a:pt x="162653" y="708485"/>
+                </a:cubicBezTo>
+                <a:cubicBezTo>
+                  <a:pt x="162068" y="692287"/>
+                  <a:pt x="154339" y="687290"/>
+                  <a:pt x="123462" y="683149"/>
+                </a:cubicBezTo>
+                <a:cubicBezTo>
+                  <a:pt x="50758" y="673397"/>
+                  <a:pt x="6448" y="622101"/>
+                  <a:pt x="6448" y="547687"/>
+                </a:cubicBezTo>
+                <a:cubicBezTo>
+                  <a:pt x="6448" y="503293"/>
+                  <a:pt x="32263" y="447674"/>
+                  <a:pt x="52867" y="447675"/>
+                </a:cubicBezTo>
+                <a:cubicBezTo>
+                  <a:pt x="60721" y="447675"/>
+                  <a:pt x="71121" y="437219"/>
+                  <a:pt x="75979" y="424441"/>
+                </a:cubicBezTo>
+                <a:cubicBezTo>
+                  <a:pt x="80838" y="411663"/>
+                  <a:pt x="93309" y="396661"/>
+                  <a:pt x="103692" y="391104"/>
+                </a:cubicBezTo>
+                <a:cubicBezTo>
+                  <a:pt x="127596" y="378311"/>
+                  <a:pt x="180975" y="377911"/>
+                  <a:pt x="180975" y="390525"/>
+                </a:cubicBezTo>
+                <a:cubicBezTo>
+                  <a:pt x="180975" y="395763"/>
+                  <a:pt x="190619" y="400066"/>
+                  <a:pt x="202406" y="400085"/>
+                </a:cubicBezTo>
+                <a:cubicBezTo>
+                  <a:pt x="283271" y="400219"/>
+                  <a:pt x="335562" y="502879"/>
+                  <a:pt x="296995" y="585787"/>
+                </a:cubicBezTo>
+                <a:lnTo>
+                  <a:pt x="279272" y="623887"/>
+                </a:lnTo>
+                <a:lnTo>
+                  <a:pt x="342042" y="701055"/>
+                </a:lnTo>
+                <a:cubicBezTo>
+                  <a:pt x="376565" y="743498"/>
+                  <a:pt x="454104" y="845079"/>
+                  <a:pt x="514350" y="926790"/>
+                </a:cubicBezTo>
+                <a:cubicBezTo>
+                  <a:pt x="625421" y="1077437"/>
+                  <a:pt x="638175" y="1090932"/>
+                  <a:pt x="638175" y="1057809"/>
+                </a:cubicBezTo>
+                <a:cubicBezTo>
+                  <a:pt x="638175" y="1005336"/>
+                  <a:pt x="772547" y="641615"/>
+                  <a:pt x="790414" y="645724"/>
+                </a:cubicBezTo>
+                <a:cubicBezTo>
+                  <a:pt x="798515" y="647587"/>
+                  <a:pt x="800752" y="641698"/>
+                  <a:pt x="797161" y="627966"/>
+                </a:cubicBezTo>
+                <a:cubicBezTo>
+                  <a:pt x="792840" y="611442"/>
+                  <a:pt x="838912" y="464058"/>
+                  <a:pt x="880695" y="360743"/>
+                </a:cubicBezTo>
+                <a:cubicBezTo>
+                  <a:pt x="885223" y="349547"/>
+                  <a:pt x="880403" y="343604"/>
+                  <a:pt x="863314" y="339315"/>
+                </a:cubicBezTo>
+                <a:cubicBezTo>
+                  <a:pt x="804912" y="324657"/>
+                  <a:pt x="752308" y="252944"/>
+                  <a:pt x="752631" y="188424"/>
+                </a:cubicBezTo>
+                <a:cubicBezTo>
+                  <a:pt x="752807" y="153261"/>
+                  <a:pt x="791264" y="79759"/>
+                  <a:pt x="807678" y="83214"/>
+                </a:cubicBezTo>
+                <a:cubicBezTo>
+                  <a:pt x="813562" y="84453"/>
+                  <a:pt x="829755" y="70548"/>
+                  <a:pt x="843663" y="52315"/>
+                </a:cubicBezTo>
+                <a:cubicBezTo>
+                  <a:pt x="890660" y="-9301"/>
+                  <a:pt x="954465" y="-10745"/>
+                  <a:pt x="1061050" y="47397"/>
+                </a:cubicBezTo>
+                <a:cubicBezTo>
+                  <a:pt x="1134554" y="87494"/>
+                  <a:pt x="1140683" y="178517"/>
+                  <a:pt x="1075561" y="262927"/>
+                </a:cubicBezTo>
+                <a:cubicBezTo>
+                  <a:pt x="1054217" y="290592"/>
+                  <a:pt x="1033150" y="314545"/>
+                  <a:pt x="1028743" y="316157"/>
+                </a:cubicBezTo>
+                <a:cubicBezTo>
+                  <a:pt x="1024337" y="317768"/>
+                  <a:pt x="1026344" y="342661"/>
+                  <a:pt x="1033203" y="371475"/>
+                </a:cubicBezTo>
+                <a:cubicBezTo>
+                  <a:pt x="1040063" y="400288"/>
+                  <a:pt x="1053013" y="458152"/>
+                  <a:pt x="1061983" y="500062"/>
+                </a:cubicBezTo>
+                <a:cubicBezTo>
+                  <a:pt x="1070953" y="541972"/>
+                  <a:pt x="1086822" y="610552"/>
+                  <a:pt x="1097247" y="652462"/>
+                </a:cubicBezTo>
+                <a:cubicBezTo>
+                  <a:pt x="1121513" y="750015"/>
+                  <a:pt x="1128539" y="795475"/>
+                  <a:pt x="1114545" y="764381"/>
+                </a:cubicBezTo>
+                <a:cubicBezTo>
+                  <a:pt x="1109240" y="752594"/>
+                  <a:pt x="1100559" y="733305"/>
+                  <a:pt x="1095254" y="721518"/>
+                </a:cubicBezTo>
+                <a:cubicBezTo>
+                  <a:pt x="1086511" y="702091"/>
+                  <a:pt x="1085978" y="702759"/>
+                  <a:pt x="1089553" y="728662"/>
+                </a:cubicBezTo>
+                <a:cubicBezTo>
+                  <a:pt x="1099396" y="799976"/>
+                  <a:pt x="1118581" y="876300"/>
+                  <a:pt x="1126663" y="876300"/>
+                </a:cubicBezTo>
+                <a:cubicBezTo>
+                  <a:pt x="1134682" y="876300"/>
+                  <a:pt x="1131864" y="853598"/>
+                  <a:pt x="1118093" y="807243"/>
+                </a:cubicBezTo>
+                <a:cubicBezTo>
+                  <a:pt x="1115369" y="798075"/>
+                  <a:pt x="1117522" y="790575"/>
+                  <a:pt x="1122876" y="790575"/>
+                </a:cubicBezTo>
+                <a:cubicBezTo>
+                  <a:pt x="1128230" y="790575"/>
+                  <a:pt x="1135139" y="806648"/>
+                  <a:pt x="1138228" y="826293"/>
+                </a:cubicBezTo>
+                <a:cubicBezTo>
+                  <a:pt x="1141317" y="845939"/>
+                  <a:pt x="1147733" y="877014"/>
+                  <a:pt x="1152486" y="895350"/>
+                </a:cubicBezTo>
+                <a:cubicBezTo>
+                  <a:pt x="1157238" y="913685"/>
+                  <a:pt x="1166778" y="953953"/>
+                  <a:pt x="1173684" y="984834"/>
+                </a:cubicBezTo>
+                <a:lnTo>
+                  <a:pt x="1186241" y="1040982"/>
+                </a:lnTo>
+                <a:lnTo>
+                  <a:pt x="1273860" y="922032"/>
+                </a:lnTo>
+                <a:cubicBezTo>
+                  <a:pt x="1350317" y="818235"/>
+                  <a:pt x="1455549" y="685564"/>
+                  <a:pt x="1585442" y="529206"/>
+                </a:cubicBezTo>
+                <a:cubicBezTo>
+                  <a:pt x="1618768" y="489091"/>
+                  <a:pt x="1621220" y="482872"/>
+                  <a:pt x="1606874" y="474843"/>
+                </a:cubicBezTo>
+                <a:cubicBezTo>
+                  <a:pt x="1528510" y="430989"/>
+                  <a:pt x="1556287" y="275810"/>
+                  <a:pt x="1650508" y="231073"/>
+                </a:cubicBezTo>
+                <a:cubicBezTo>
+                  <a:pt x="1675226" y="219337"/>
+                  <a:pt x="1695450" y="205783"/>
+                  <a:pt x="1695450" y="200954"/>
+                </a:cubicBezTo>
+                <a:cubicBezTo>
+                  <a:pt x="1695450" y="180764"/>
+                  <a:pt x="1769902" y="179310"/>
+                  <a:pt x="1813617" y="198648"/>
+                </a:cubicBezTo>
+                <a:cubicBezTo>
+                  <a:pt x="1932413" y="251196"/>
+                  <a:pt x="1923897" y="417059"/>
+                  <a:pt x="1799090" y="481599"/>
+                </a:cubicBezTo>
+                <a:cubicBezTo>
+                  <a:pt x="1774098" y="494522"/>
+                  <a:pt x="1771649" y="500286"/>
+                  <a:pt x="1771650" y="546182"/>
+                </a:cubicBezTo>
+                <a:cubicBezTo>
+                  <a:pt x="1771650" y="573899"/>
+                  <a:pt x="1767766" y="619866"/>
+                  <a:pt x="1763019" y="648331"/>
+                </a:cubicBezTo>
+                <a:cubicBezTo>
+                  <a:pt x="1758272" y="676797"/>
+                  <a:pt x="1749404" y="751522"/>
+                  <a:pt x="1743314" y="814387"/>
+                </a:cubicBezTo>
+                <a:cubicBezTo>
+                  <a:pt x="1730151" y="950244"/>
+                  <a:pt x="1705057" y="1144549"/>
+                  <a:pt x="1671967" y="1366837"/>
+                </a:cubicBezTo>
+                <a:cubicBezTo>
+                  <a:pt x="1642119" y="1567343"/>
+                  <a:pt x="1641432" y="1553042"/>
+                  <a:pt x="1682186" y="1579450"/>
+                </a:cubicBezTo>
+                <a:cubicBezTo>
+                  <a:pt x="1700955" y="1591612"/>
+                  <a:pt x="1713887" y="1603987"/>
+                  <a:pt x="1710924" y="1606950"/>
+                </a:cubicBezTo>
+                <a:cubicBezTo>
+                  <a:pt x="1707962" y="1609912"/>
+                  <a:pt x="1713920" y="1624110"/>
+                  <a:pt x="1724166" y="1638499"/>
+                </a:cubicBezTo>
+                <a:cubicBezTo>
+                  <a:pt x="1742365" y="1664056"/>
+                  <a:pt x="1742386" y="1665181"/>
+                  <a:pt x="1725067" y="1687199"/>
+                </a:cubicBezTo>
+                <a:cubicBezTo>
+                  <a:pt x="1715316" y="1699595"/>
+                  <a:pt x="1706911" y="1714023"/>
+                  <a:pt x="1706390" y="1719262"/>
+                </a:cubicBezTo>
+                <a:cubicBezTo>
+                  <a:pt x="1705869" y="1724501"/>
+                  <a:pt x="1684977" y="1731328"/>
+                  <a:pt x="1659964" y="1734434"/>
+                </a:cubicBezTo>
+                <a:cubicBezTo>
+                  <a:pt x="1634952" y="1737540"/>
+                  <a:pt x="1620702" y="1740755"/>
+                  <a:pt x="1628298" y="1741578"/>
+                </a:cubicBezTo>
+                <a:cubicBezTo>
+                  <a:pt x="1637335" y="1742557"/>
+                  <a:pt x="1638877" y="1746307"/>
+                  <a:pt x="1632758" y="1752426"/>
+                </a:cubicBezTo>
+                <a:cubicBezTo>
+                  <a:pt x="1627615" y="1757569"/>
+                  <a:pt x="1578307" y="1763398"/>
+                  <a:pt x="1523186" y="1765377"/>
+                </a:cubicBezTo>
+                <a:cubicBezTo>
+                  <a:pt x="1468065" y="1767357"/>
+                  <a:pt x="1414623" y="1773440"/>
+                  <a:pt x="1404426" y="1778894"/>
+                </a:cubicBezTo>
+                <a:cubicBezTo>
+                  <a:pt x="1368849" y="1797925"/>
+                  <a:pt x="1266680" y="1813415"/>
+                  <a:pt x="1254838" y="1801573"/>
+                </a:cubicBezTo>
+                <a:cubicBezTo>
+                  <a:pt x="1239453" y="1786188"/>
+                  <a:pt x="1228319" y="1788085"/>
+                  <a:pt x="1234805" y="1804987"/>
+                </a:cubicBezTo>
+                <a:cubicBezTo>
+                  <a:pt x="1238609" y="1814901"/>
+                  <a:pt x="1234144" y="1819275"/>
+                  <a:pt x="1220219" y="1819275"/>
+                </a:cubicBezTo>
+                <a:cubicBezTo>
+                  <a:pt x="1209181" y="1819275"/>
+                  <a:pt x="1200150" y="1814988"/>
+                  <a:pt x="1200150" y="1809750"/>
+                </a:cubicBezTo>
+                <a:cubicBezTo>
+                  <a:pt x="1200150" y="1804511"/>
+                  <a:pt x="1192649" y="1800290"/>
+                  <a:pt x="1183481" y="1800370"/>
+                </a:cubicBezTo>
+                <a:cubicBezTo>
+                  <a:pt x="1169090" y="1800496"/>
+                  <a:pt x="1168765" y="1801903"/>
+                  <a:pt x="1181100" y="1810666"/>
+                </a:cubicBezTo>
+                <a:cubicBezTo>
+                  <a:pt x="1192119" y="1818494"/>
+                  <a:pt x="1189445" y="1819521"/>
+                  <a:pt x="1169410" y="1815155"/>
+                </a:cubicBezTo>
+                <a:cubicBezTo>
+                  <a:pt x="1155122" y="1812042"/>
+                  <a:pt x="1092971" y="1815748"/>
+                  <a:pt x="1031297" y="1823391"/>
+                </a:cubicBezTo>
+                <a:cubicBezTo>
+                  <a:pt x="969623" y="1831034"/>
+                  <a:pt x="887889" y="1840119"/>
+                  <a:pt x="849667" y="1843579"/>
+                </a:cubicBezTo>
+                <a:cubicBezTo>
+                  <a:pt x="788338" y="1849132"/>
+                  <a:pt x="782183" y="1851395"/>
+                  <a:pt x="797280" y="1862845"/>
+                </a:cubicBezTo>
+                <a:cubicBezTo>
+                  <a:pt x="812510" y="1874395"/>
+                  <a:pt x="809684" y="1875778"/>
+                  <a:pt x="771525" y="1875452"/>
+                </a:cubicBezTo>
+                <a:cubicBezTo>
+                  <a:pt x="738991" y="1875174"/>
+                  <a:pt x="733252" y="1873113"/>
+                  <a:pt x="747712" y="1866900"/>
+                </a:cubicBezTo>
+                <a:cubicBezTo>
+                  <a:pt x="761534" y="1860960"/>
+                  <a:pt x="751078" y="1858211"/>
+                  <a:pt x="709612" y="1856881"/>
+                </a:cubicBezTo>
+                <a:lnTo>
+                  <a:pt x="652462" y="1855049"/>
+                </a:lnTo>
+                <a:lnTo>
+                  <a:pt x="714375" y="1842308"/>
+                </a:lnTo>
+                <a:lnTo>
+                  <a:pt x="776287" y="1829568"/>
+                </a:lnTo>
+                <a:lnTo>
+                  <a:pt x="709612" y="1834409"/>
+                </a:lnTo>
+                <a:cubicBezTo>
+                  <a:pt x="672941" y="1837071"/>
+                  <a:pt x="641499" y="1843354"/>
+                  <a:pt x="639742" y="1848371"/>
+                </a:cubicBezTo>
+                <a:cubicBezTo>
+                  <a:pt x="637985" y="1853388"/>
+                  <a:pt x="632923" y="1855253"/>
+                  <a:pt x="628494" y="1852516"/>
+                </a:cubicBezTo>
+                <a:cubicBezTo>
+                  <a:pt x="624065" y="1849779"/>
+                  <a:pt x="617749" y="1851895"/>
+                  <a:pt x="614458" y="1857219"/>
+                </a:cubicBezTo>
+                <a:cubicBezTo>
+                  <a:pt x="610740" y="1863236"/>
+                  <a:pt x="624911" y="1866900"/>
+                  <a:pt x="651900" y="1866900"/>
+                </a:cubicBezTo>
+                <a:cubicBezTo>
+                  <a:pt x="675783" y="1866900"/>
+                  <a:pt x="695325" y="1871186"/>
+                  <a:pt x="695325" y="1876425"/>
+                </a:cubicBezTo>
+                <a:cubicBezTo>
+                  <a:pt x="695325" y="1881663"/>
+                  <a:pt x="673893" y="1885950"/>
+                  <a:pt x="647700" y="1885950"/>
+                </a:cubicBezTo>
+                <a:cubicBezTo>
+                  <a:pt x="616027" y="1885950"/>
+                  <a:pt x="600026" y="1881961"/>
+                  <a:pt x="599929" y="1874043"/>
+                </a:cubicBezTo>
+                <a:cubicBezTo>
+                  <a:pt x="599828" y="1865855"/>
+                  <a:pt x="597056" y="1866447"/>
+                  <a:pt x="591051" y="1875940"/>
+                </a:cubicBezTo>
+                <a:cubicBezTo>
+                  <a:pt x="582371" y="1889660"/>
+                  <a:pt x="474772" y="1897750"/>
+                  <a:pt x="419100" y="1888868"/>
+                </a:cubicBezTo>
+                <a:close/>
+                <a:moveTo>
+                  <a:pt x="874519" y="1767080"/>
+                </a:moveTo>
+                <a:cubicBezTo>
+                  <a:pt x="877245" y="1764354"/>
+                  <a:pt x="861615" y="1762125"/>
+                  <a:pt x="839787" y="1762125"/>
+                </a:cubicBezTo>
+                <a:cubicBezTo>
+                  <a:pt x="783346" y="1762125"/>
+                  <a:pt x="790364" y="1745783"/>
+                  <a:pt x="847357" y="1744499"/>
+                </a:cubicBezTo>
+                <a:cubicBezTo>
+                  <a:pt x="882231" y="1743713"/>
+                  <a:pt x="893384" y="1746639"/>
+                  <a:pt x="889920" y="1755667"/>
+                </a:cubicBezTo>
+                <a:cubicBezTo>
+                  <a:pt x="881125" y="1778585"/>
+                  <a:pt x="1207021" y="1740370"/>
+                  <a:pt x="1226343" y="1716217"/>
+                </a:cubicBezTo>
+                <a:cubicBezTo>
+                  <a:pt x="1233574" y="1707177"/>
+                  <a:pt x="1238250" y="1705788"/>
+                  <a:pt x="1238250" y="1712679"/>
+                </a:cubicBezTo>
+                <a:cubicBezTo>
+                  <a:pt x="1238250" y="1718919"/>
+                  <a:pt x="1247894" y="1723686"/>
+                  <a:pt x="1259681" y="1723273"/>
+                </a:cubicBezTo>
+                <a:cubicBezTo>
+                  <a:pt x="1271468" y="1722859"/>
+                  <a:pt x="1275727" y="1720350"/>
+                  <a:pt x="1269146" y="1717696"/>
+                </a:cubicBezTo>
+                <a:cubicBezTo>
+                  <a:pt x="1262565" y="1715043"/>
+                  <a:pt x="1259732" y="1708744"/>
+                  <a:pt x="1262851" y="1703698"/>
+                </a:cubicBezTo>
+                <a:cubicBezTo>
+                  <a:pt x="1266385" y="1697979"/>
+                  <a:pt x="1273262" y="1698459"/>
+                  <a:pt x="1281112" y="1704975"/>
+                </a:cubicBezTo>
+                <a:cubicBezTo>
+                  <a:pt x="1289821" y="1712202"/>
+                  <a:pt x="1295607" y="1712345"/>
+                  <a:pt x="1299876" y="1705437"/>
+                </a:cubicBezTo>
+                <a:cubicBezTo>
+                  <a:pt x="1303271" y="1699944"/>
+                  <a:pt x="1321869" y="1694915"/>
+                  <a:pt x="1341205" y="1694261"/>
+                </a:cubicBezTo>
+                <a:cubicBezTo>
+                  <a:pt x="1432490" y="1691176"/>
+                  <a:pt x="1260388" y="1676140"/>
+                  <a:pt x="1123950" y="1675281"/>
+                </a:cubicBezTo>
+                <a:cubicBezTo>
+                  <a:pt x="973726" y="1674334"/>
+                  <a:pt x="848129" y="1688006"/>
+                  <a:pt x="667404" y="1724977"/>
+                </a:cubicBezTo>
+                <a:cubicBezTo>
+                  <a:pt x="546933" y="1749621"/>
+                  <a:pt x="547655" y="1754451"/>
+                  <a:pt x="671526" y="1752561"/>
+                </a:cubicBezTo>
+                <a:cubicBezTo>
+                  <a:pt x="799573" y="1750607"/>
+                  <a:pt x="805169" y="1751519"/>
+                  <a:pt x="757237" y="1766525"/>
+                </a:cubicBezTo>
+                <a:cubicBezTo>
+                  <a:pt x="720747" y="1777948"/>
+                  <a:pt x="722315" y="1778317"/>
+                  <a:pt x="794350" y="1775244"/>
+                </a:cubicBezTo>
+                <a:cubicBezTo>
+                  <a:pt x="835718" y="1773479"/>
+                  <a:pt x="871794" y="1769805"/>
+                  <a:pt x="874519" y="1767080"/>
+                </a:cubicBezTo>
+                <a:close/>
+                <a:moveTo>
+                  <a:pt x="1042987" y="1637640"/>
+                </a:moveTo>
+                <a:cubicBezTo>
+                  <a:pt x="1137284" y="1630101"/>
+                  <a:pt x="1137045" y="1630067"/>
+                  <a:pt x="1019175" y="1634264"/>
+                </a:cubicBezTo>
+                <a:cubicBezTo>
+                  <a:pt x="953690" y="1636597"/>
+                  <a:pt x="887253" y="1642654"/>
+                  <a:pt x="871537" y="1647726"/>
+                </a:cubicBezTo>
+                <a:cubicBezTo>
+                  <a:pt x="849047" y="1654985"/>
+                  <a:pt x="854117" y="1655703"/>
+                  <a:pt x="895350" y="1651102"/>
+                </a:cubicBezTo>
+                <a:cubicBezTo>
+                  <a:pt x="924163" y="1647886"/>
+                  <a:pt x="990600" y="1641828"/>
+                  <a:pt x="1042987" y="1637640"/>
+                </a:cubicBezTo>
+                <a:close/>
+                <a:moveTo>
+                  <a:pt x="728662" y="1515667"/>
+                </a:moveTo>
+                <a:cubicBezTo>
+                  <a:pt x="998112" y="1464477"/>
+                  <a:pt x="1305771" y="1462566"/>
+                  <a:pt x="1501107" y="1510868"/>
+                </a:cubicBezTo>
+                <a:cubicBezTo>
+                  <a:pt x="1519855" y="1515504"/>
+                  <a:pt x="1521431" y="1510962"/>
+                  <a:pt x="1526883" y="1436559"/>
+                </a:cubicBezTo>
+                <a:cubicBezTo>
+                  <a:pt x="1530077" y="1392973"/>
+                  <a:pt x="1538933" y="1320879"/>
+                  <a:pt x="1546565" y="1276350"/>
+                </a:cubicBezTo>
+                <a:cubicBezTo>
+                  <a:pt x="1554196" y="1231820"/>
+                  <a:pt x="1562769" y="1176099"/>
+                  <a:pt x="1565616" y="1152525"/>
+                </a:cubicBezTo>
+                <a:cubicBezTo>
+                  <a:pt x="1580554" y="1028847"/>
+                  <a:pt x="1591849" y="946205"/>
+                  <a:pt x="1595558" y="933450"/>
+                </a:cubicBezTo>
+                <a:cubicBezTo>
+                  <a:pt x="1607558" y="892182"/>
+                  <a:pt x="1629035" y="671124"/>
+                  <a:pt x="1619879" y="683122"/>
+                </a:cubicBezTo>
+                <a:cubicBezTo>
+                  <a:pt x="1616756" y="687214"/>
+                  <a:pt x="1603550" y="703421"/>
+                  <a:pt x="1590532" y="719137"/>
+                </a:cubicBezTo>
+                <a:lnTo>
+                  <a:pt x="1566862" y="747712"/>
+                </a:lnTo>
+                <a:lnTo>
+                  <a:pt x="1594581" y="723900"/>
+                </a:lnTo>
+                <a:cubicBezTo>
+                  <a:pt x="1654120" y="672751"/>
+                  <a:pt x="1634906" y="700337"/>
+                  <a:pt x="1292712" y="1157287"/>
+                </a:cubicBezTo>
+                <a:cubicBezTo>
+                  <a:pt x="1245635" y="1220152"/>
+                  <a:pt x="1201263" y="1270992"/>
+                  <a:pt x="1194108" y="1270264"/>
+                </a:cubicBezTo>
+                <a:cubicBezTo>
+                  <a:pt x="1186954" y="1269536"/>
+                  <a:pt x="1181100" y="1274894"/>
+                  <a:pt x="1181100" y="1282170"/>
+                </a:cubicBezTo>
+                <a:cubicBezTo>
+                  <a:pt x="1181100" y="1304786"/>
+                  <a:pt x="1135755" y="1297028"/>
+                  <a:pt x="1110831" y="1270148"/>
+                </a:cubicBezTo>
+                <a:cubicBezTo>
+                  <a:pt x="1086293" y="1243685"/>
+                  <a:pt x="1038999" y="1066739"/>
+                  <a:pt x="970577" y="745399"/>
+                </a:cubicBezTo>
+                <a:cubicBezTo>
+                  <a:pt x="953574" y="665546"/>
+                  <a:pt x="937929" y="601945"/>
+                  <a:pt x="935811" y="604063"/>
+                </a:cubicBezTo>
+                <a:cubicBezTo>
+                  <a:pt x="933692" y="606182"/>
+                  <a:pt x="911378" y="669373"/>
+                  <a:pt x="886223" y="744489"/>
+                </a:cubicBezTo>
+                <a:cubicBezTo>
+                  <a:pt x="860589" y="821038"/>
+                  <a:pt x="835799" y="880015"/>
+                  <a:pt x="829819" y="878681"/>
+                </a:cubicBezTo>
+                <a:cubicBezTo>
+                  <a:pt x="823951" y="877371"/>
+                  <a:pt x="819150" y="880235"/>
+                  <a:pt x="819150" y="885045"/>
+                </a:cubicBezTo>
+                <a:cubicBezTo>
+                  <a:pt x="819150" y="889856"/>
+                  <a:pt x="816278" y="901275"/>
+                  <a:pt x="812768" y="910421"/>
+                </a:cubicBezTo>
+                <a:cubicBezTo>
+                  <a:pt x="808418" y="921758"/>
+                  <a:pt x="809933" y="924858"/>
+                  <a:pt x="817531" y="920162"/>
+                </a:cubicBezTo>
+                <a:cubicBezTo>
+                  <a:pt x="829723" y="912627"/>
+                  <a:pt x="831906" y="923471"/>
+                  <a:pt x="822914" y="946903"/>
+                </a:cubicBezTo>
+                <a:cubicBezTo>
+                  <a:pt x="819746" y="955160"/>
+                  <a:pt x="813365" y="959574"/>
+                  <a:pt x="808736" y="956713"/>
+                </a:cubicBezTo>
+                <a:cubicBezTo>
+                  <a:pt x="804106" y="953851"/>
+                  <a:pt x="803140" y="958865"/>
+                  <a:pt x="806590" y="967855"/>
+                </a:cubicBezTo>
+                <a:cubicBezTo>
+                  <a:pt x="810845" y="978944"/>
+                  <a:pt x="809279" y="981985"/>
+                  <a:pt x="801718" y="977312"/>
+                </a:cubicBezTo>
+                <a:cubicBezTo>
+                  <a:pt x="795589" y="973524"/>
+                  <a:pt x="790575" y="974607"/>
+                  <a:pt x="790575" y="979719"/>
+                </a:cubicBezTo>
+                <a:cubicBezTo>
+                  <a:pt x="790575" y="984830"/>
+                  <a:pt x="794622" y="990441"/>
+                  <a:pt x="799569" y="992187"/>
+                </a:cubicBezTo>
+                <a:cubicBezTo>
+                  <a:pt x="804516" y="993933"/>
+                  <a:pt x="794303" y="1044654"/>
+                  <a:pt x="776875" y="1104900"/>
+                </a:cubicBezTo>
+                <a:cubicBezTo>
+                  <a:pt x="759446" y="1165145"/>
+                  <a:pt x="742661" y="1225417"/>
+                  <a:pt x="739574" y="1238836"/>
+                </a:cubicBezTo>
+                <a:cubicBezTo>
+                  <a:pt x="732618" y="1269080"/>
+                  <a:pt x="696932" y="1310485"/>
+                  <a:pt x="671512" y="1317807"/>
+                </a:cubicBezTo>
+                <a:cubicBezTo>
+                  <a:pt x="640795" y="1326654"/>
+                  <a:pt x="603009" y="1285191"/>
+                  <a:pt x="466594" y="1092940"/>
+                </a:cubicBezTo>
+                <a:cubicBezTo>
+                  <a:pt x="396874" y="994684"/>
+                  <a:pt x="338834" y="915388"/>
+                  <a:pt x="337616" y="916727"/>
+                </a:cubicBezTo>
+                <a:cubicBezTo>
+                  <a:pt x="336397" y="918066"/>
+                  <a:pt x="345180" y="972740"/>
+                  <a:pt x="357133" y="1038225"/>
+                </a:cubicBezTo>
+                <a:cubicBezTo>
+                  <a:pt x="369086" y="1103709"/>
+                  <a:pt x="383552" y="1191577"/>
+                  <a:pt x="389280" y="1233487"/>
+                </a:cubicBezTo>
+                <a:cubicBezTo>
+                  <a:pt x="395007" y="1275397"/>
+                  <a:pt x="406408" y="1358294"/>
+                  <a:pt x="414614" y="1417702"/>
+                </a:cubicBezTo>
+                <a:cubicBezTo>
+                  <a:pt x="422865" y="1477434"/>
+                  <a:pt x="426763" y="1544195"/>
+                  <a:pt x="423335" y="1567054"/>
+                </a:cubicBezTo>
+                <a:lnTo>
+                  <a:pt x="417136" y="1608391"/>
+                </a:lnTo>
+                <a:lnTo>
+                  <a:pt x="520512" y="1571982"/>
+                </a:lnTo>
+                <a:cubicBezTo>
+                  <a:pt x="577368" y="1551956"/>
+                  <a:pt x="671036" y="1526615"/>
+                  <a:pt x="728662" y="1515667"/>
+                </a:cubicBezTo>
+                <a:close/>
+                <a:moveTo>
+                  <a:pt x="541793" y="990086"/>
+                </a:moveTo>
+                <a:cubicBezTo>
+                  <a:pt x="519546" y="958371"/>
+                  <a:pt x="496998" y="929737"/>
+                  <a:pt x="491686" y="926454"/>
+                </a:cubicBezTo>
+                <a:cubicBezTo>
+                  <a:pt x="482184" y="920581"/>
+                  <a:pt x="505251" y="955912"/>
+                  <a:pt x="550668" y="1016793"/>
+                </a:cubicBezTo>
+                <a:cubicBezTo>
+                  <a:pt x="590752" y="1070527"/>
+                  <a:pt x="584031" y="1050301"/>
+                  <a:pt x="541793" y="990086"/>
+                </a:cubicBezTo>
+                <a:close/>
+                <a:moveTo>
+                  <a:pt x="1735137" y="357333"/>
+                </a:moveTo>
+                <a:cubicBezTo>
+                  <a:pt x="1749776" y="356997"/>
+                  <a:pt x="1752118" y="344833"/>
+                  <a:pt x="1739551" y="334403"/>
+                </a:cubicBezTo>
+                <a:cubicBezTo>
+                  <a:pt x="1728998" y="325645"/>
+                  <a:pt x="1722677" y="326558"/>
+                  <a:pt x="1710659" y="338576"/>
+                </a:cubicBezTo>
+                <a:cubicBezTo>
+                  <a:pt x="1693868" y="355366"/>
+                  <a:pt x="1699367" y="376189"/>
+                  <a:pt x="1717539" y="364632"/>
+                </a:cubicBezTo>
+                <a:cubicBezTo>
+                  <a:pt x="1723725" y="360698"/>
+                  <a:pt x="1731645" y="357413"/>
+                  <a:pt x="1735137" y="357333"/>
+                </a:cubicBezTo>
+                <a:close/>
+                <a:moveTo>
+                  <a:pt x="970073" y="170892"/>
+                </a:moveTo>
+                <a:cubicBezTo>
+                  <a:pt x="975736" y="132652"/>
+                  <a:pt x="945401" y="120225"/>
+                  <a:pt x="918156" y="149623"/>
+                </a:cubicBezTo>
+                <a:cubicBezTo>
+                  <a:pt x="891081" y="178837"/>
+                  <a:pt x="889328" y="195665"/>
+                  <a:pt x="912018" y="208526"/>
+                </a:cubicBezTo>
+                <a:cubicBezTo>
+                  <a:pt x="934093" y="221038"/>
+                  <a:pt x="965679" y="200562"/>
+                  <a:pt x="970073" y="170892"/>
+                </a:cubicBezTo>
+                <a:close/>
+              </a:path>
+            </a:pathLst>
+          </a:custGeom>
+          <a:solidFill>
+            <a:srgbClr val="CEACD6"/>
+          </a:solidFill>
+          <a:ln>
+            <a:noFill/>
+          </a:ln>
+        </p:spPr>
+      </p:sp>
       <p:pic>
         <p:nvPicPr>
-          <p:cNvPr id="6" name="crown" descr="017.png"/>
+          <p:cNvPr id="7" name="ticket stub" descr="014.png"/>
           <p:cNvPicPr>
             <a:picLocks noChangeAspect="1"/>
           </p:cNvPicPr>
@@ -4609,30 +5613,6 @@
         </p:nvPicPr>
         <p:blipFill>
           <a:blip r:embed="rId6"/>
-          <a:stretch>
-            <a:fillRect/>
-          </a:stretch>
-        </p:blipFill>
-        <p:spPr>
-          <a:xfrm rot="21000000">
-            <a:off x="7429500" y="1433512"/>
-            <a:ext cx="1905000" cy="1895475"/>
-          </a:xfrm>
-          <a:prstGeom prst="rect">
-            <a:avLst/>
-          </a:prstGeom>
-        </p:spPr>
-      </p:pic>
-      <p:pic>
-        <p:nvPicPr>
-          <p:cNvPr id="7" name="ticket stub" descr="018.png"/>
-          <p:cNvPicPr>
-            <a:picLocks noChangeAspect="1"/>
-          </p:cNvPicPr>
-          <p:nvPr/>
-        </p:nvPicPr>
-        <p:blipFill>
-          <a:blip r:embed="rId7"/>
           <a:stretch>
             <a:fillRect/>
           </a:stretch>
@@ -4744,33 +5724,34 @@
           </a:prstGeom>
         </p:spPr>
       </p:pic>
-      <p:pic>
-        <p:nvPicPr>
-          <p:cNvPr id="3" name="PHOTO: Favourite 2 (top of the page)" descr="019.png"/>
-          <p:cNvPicPr>
-            <a:picLocks noChangeAspect="1"/>
-          </p:cNvPicPr>
+      <p:sp>
+        <p:nvSpPr>
+          <p:cNvPr id="3" name="PHOTO: Favourite 2 (top of the page)"/>
+          <p:cNvSpPr/>
           <p:nvPr/>
-        </p:nvPicPr>
-        <p:blipFill>
-          <a:blip r:embed="rId3"/>
-          <a:stretch>
-            <a:fillRect/>
-          </a:stretch>
-        </p:blipFill>
+        </p:nvSpPr>
         <p:spPr>
-          <a:xfrm>
+          <a:xfrm rot="0">
             <a:off x="0" y="0"/>
             <a:ext cx="10287000" cy="8572500"/>
           </a:xfrm>
           <a:prstGeom prst="rect">
             <a:avLst/>
           </a:prstGeom>
+          <a:blipFill rotWithShape="1">
+            <a:blip r:embed="rId3"/>
+            <a:stretch>
+              <a:fillRect/>
+            </a:stretch>
+          </a:blipFill>
+          <a:ln>
+            <a:noFill/>
+          </a:ln>
         </p:spPr>
-      </p:pic>
+      </p:sp>
       <p:pic>
         <p:nvPicPr>
-          <p:cNvPr id="4" name="torn night" descr="020.png"/>
+          <p:cNvPr id="4" name="torn night" descr="015.png"/>
           <p:cNvPicPr>
             <a:picLocks noChangeAspect="1"/>
           </p:cNvPicPr>
@@ -4794,7 +5775,7 @@
       </p:pic>
       <p:pic>
         <p:nvPicPr>
-          <p:cNvPr id="5" name="2" descr="021.png"/>
+          <p:cNvPr id="5" name="2" descr="016.png"/>
           <p:cNvPicPr>
             <a:picLocks noChangeAspect="1"/>
           </p:cNvPicPr>
@@ -4816,9 +5797,720 @@
           </a:prstGeom>
         </p:spPr>
       </p:pic>
+      <p:sp>
+        <p:nvSpPr>
+          <p:cNvPr id="6" name="heart"/>
+          <p:cNvSpPr/>
+          <p:nvPr/>
+        </p:nvSpPr>
+        <p:spPr>
+          <a:xfrm rot="-480000">
+            <a:off x="7810500" y="8977312"/>
+            <a:ext cx="1524000" cy="1476375"/>
+          </a:xfrm>
+          <a:custGeom>
+            <a:avLst/>
+            <a:gdLst/>
+            <a:ahLst/>
+            <a:cxnLst/>
+            <a:rect l="0" t="0" r="r" b="b"/>
+            <a:pathLst>
+              <a:path w="1524000" h="1476375">
+                <a:moveTo>
+                  <a:pt x="833437" y="1466850"/>
+                </a:moveTo>
+                <a:cubicBezTo>
+                  <a:pt x="830199" y="1461611"/>
+                  <a:pt x="820302" y="1457312"/>
+                  <a:pt x="811444" y="1457296"/>
+                </a:cubicBezTo>
+                <a:cubicBezTo>
+                  <a:pt x="789955" y="1457257"/>
+                  <a:pt x="557212" y="1303232"/>
+                  <a:pt x="557212" y="1289050"/>
+                </a:cubicBezTo>
+                <a:cubicBezTo>
+                  <a:pt x="557212" y="1282938"/>
+                  <a:pt x="553310" y="1274365"/>
+                  <a:pt x="548541" y="1270000"/>
+                </a:cubicBezTo>
+                <a:cubicBezTo>
+                  <a:pt x="543422" y="1265313"/>
+                  <a:pt x="542990" y="1267445"/>
+                  <a:pt x="547486" y="1275204"/>
+                </a:cubicBezTo>
+                <a:cubicBezTo>
+                  <a:pt x="552694" y="1284193"/>
+                  <a:pt x="550919" y="1286952"/>
+                  <a:pt x="541869" y="1283935"/>
+                </a:cubicBezTo>
+                <a:cubicBezTo>
+                  <a:pt x="534591" y="1281509"/>
+                  <a:pt x="528637" y="1274871"/>
+                  <a:pt x="528637" y="1269184"/>
+                </a:cubicBezTo>
+                <a:cubicBezTo>
+                  <a:pt x="528637" y="1258955"/>
+                  <a:pt x="474089" y="1214716"/>
+                  <a:pt x="409575" y="1172623"/>
+                </a:cubicBezTo>
+                <a:cubicBezTo>
+                  <a:pt x="379870" y="1153242"/>
+                  <a:pt x="378719" y="1153064"/>
+                  <a:pt x="399018" y="1170986"/>
+                </a:cubicBezTo>
+                <a:cubicBezTo>
+                  <a:pt x="439415" y="1206656"/>
+                  <a:pt x="413994" y="1201565"/>
+                  <a:pt x="366894" y="1164553"/>
+                </a:cubicBezTo>
+                <a:cubicBezTo>
+                  <a:pt x="250888" y="1073395"/>
+                  <a:pt x="160972" y="987771"/>
+                  <a:pt x="166399" y="973628"/>
+                </a:cubicBezTo>
+                <a:cubicBezTo>
+                  <a:pt x="172408" y="957969"/>
+                  <a:pt x="135571" y="911903"/>
+                  <a:pt x="123168" y="919568"/>
+                </a:cubicBezTo>
+                <a:cubicBezTo>
+                  <a:pt x="95412" y="936722"/>
+                  <a:pt x="17834" y="758607"/>
+                  <a:pt x="4584" y="647303"/>
+                </a:cubicBezTo>
+                <a:cubicBezTo>
+                  <a:pt x="-10791" y="518145"/>
+                  <a:pt x="92321" y="279716"/>
+                  <a:pt x="166957" y="271846"/>
+                </a:cubicBezTo>
+                <a:cubicBezTo>
+                  <a:pt x="197220" y="268655"/>
+                  <a:pt x="266497" y="234330"/>
+                  <a:pt x="266603" y="222475"/>
+                </a:cubicBezTo>
+                <a:cubicBezTo>
+                  <a:pt x="266726" y="208655"/>
+                  <a:pt x="289599" y="199780"/>
+                  <a:pt x="322247" y="200884"/>
+                </a:cubicBezTo>
+                <a:cubicBezTo>
+                  <a:pt x="346378" y="201699"/>
+                  <a:pt x="346099" y="202194"/>
+                  <a:pt x="316706" y="210681"/>
+                </a:cubicBezTo>
+                <a:cubicBezTo>
+                  <a:pt x="273648" y="223113"/>
+                  <a:pt x="278032" y="226843"/>
+                  <a:pt x="330993" y="222838"/>
+                </a:cubicBezTo>
+                <a:lnTo>
+                  <a:pt x="376237" y="219416"/>
+                </a:lnTo>
+                <a:lnTo>
+                  <a:pt x="333375" y="232598"/>
+                </a:lnTo>
+                <a:cubicBezTo>
+                  <a:pt x="293549" y="244845"/>
+                  <a:pt x="292537" y="245922"/>
+                  <a:pt x="319087" y="247800"/>
+                </a:cubicBezTo>
+                <a:cubicBezTo>
+                  <a:pt x="401901" y="253658"/>
+                  <a:pt x="479865" y="274277"/>
+                  <a:pt x="522320" y="301549"/>
+                </a:cubicBezTo>
+                <a:cubicBezTo>
+                  <a:pt x="534561" y="309413"/>
+                  <a:pt x="546574" y="313850"/>
+                  <a:pt x="549014" y="311410"/>
+                </a:cubicBezTo>
+                <a:cubicBezTo>
+                  <a:pt x="551455" y="308969"/>
+                  <a:pt x="537999" y="297422"/>
+                  <a:pt x="519112" y="285750"/>
+                </a:cubicBezTo>
+                <a:cubicBezTo>
+                  <a:pt x="500225" y="274077"/>
+                  <a:pt x="486726" y="262573"/>
+                  <a:pt x="489113" y="260186"/>
+                </a:cubicBezTo>
+                <a:cubicBezTo>
+                  <a:pt x="495737" y="253562"/>
+                  <a:pt x="564957" y="291070"/>
+                  <a:pt x="601184" y="320913"/>
+                </a:cubicBezTo>
+                <a:cubicBezTo>
+                  <a:pt x="618909" y="335515"/>
+                  <a:pt x="627443" y="339902"/>
+                  <a:pt x="620148" y="330663"/>
+                </a:cubicBezTo>
+                <a:cubicBezTo>
+                  <a:pt x="612853" y="321424"/>
+                  <a:pt x="610086" y="310753"/>
+                  <a:pt x="613997" y="306951"/>
+                </a:cubicBezTo>
+                <a:cubicBezTo>
+                  <a:pt x="617909" y="303148"/>
+                  <a:pt x="648067" y="328966"/>
+                  <a:pt x="681014" y="364323"/>
+                </a:cubicBezTo>
+                <a:cubicBezTo>
+                  <a:pt x="724862" y="411379"/>
+                  <a:pt x="742398" y="424749"/>
+                  <a:pt x="746443" y="414210"/>
+                </a:cubicBezTo>
+                <a:cubicBezTo>
+                  <a:pt x="780742" y="324827"/>
+                  <a:pt x="982579" y="102286"/>
+                  <a:pt x="1072564" y="54636"/>
+                </a:cubicBezTo>
+                <a:cubicBezTo>
+                  <a:pt x="1142882" y="17401"/>
+                  <a:pt x="1231859" y="-3301"/>
+                  <a:pt x="1288996" y="4277"/>
+                </a:cubicBezTo>
+                <a:cubicBezTo>
+                  <a:pt x="1357238" y="13330"/>
+                  <a:pt x="1433787" y="55287"/>
+                  <a:pt x="1415474" y="73600"/>
+                </a:cubicBezTo>
+                <a:cubicBezTo>
+                  <a:pt x="1412362" y="76712"/>
+                  <a:pt x="1401952" y="72140"/>
+                  <a:pt x="1392339" y="63441"/>
+                </a:cubicBezTo>
+                <a:cubicBezTo>
+                  <a:pt x="1382727" y="54742"/>
+                  <a:pt x="1369199" y="47624"/>
+                  <a:pt x="1362277" y="47624"/>
+                </a:cubicBezTo>
+                <a:cubicBezTo>
+                  <a:pt x="1355355" y="47624"/>
+                  <a:pt x="1367193" y="60303"/>
+                  <a:pt x="1388584" y="75798"/>
+                </a:cubicBezTo>
+                <a:cubicBezTo>
+                  <a:pt x="1409974" y="91293"/>
+                  <a:pt x="1438885" y="123440"/>
+                  <a:pt x="1452830" y="147235"/>
+                </a:cubicBezTo>
+                <a:cubicBezTo>
+                  <a:pt x="1466775" y="171031"/>
+                  <a:pt x="1480008" y="190500"/>
+                  <a:pt x="1482236" y="190500"/>
+                </a:cubicBezTo>
+                <a:cubicBezTo>
+                  <a:pt x="1489079" y="190500"/>
+                  <a:pt x="1448699" y="115980"/>
+                  <a:pt x="1438411" y="109621"/>
+                </a:cubicBezTo>
+                <a:cubicBezTo>
+                  <a:pt x="1433097" y="106337"/>
+                  <a:pt x="1428885" y="96402"/>
+                  <a:pt x="1429051" y="87544"/>
+                </a:cubicBezTo>
+                <a:cubicBezTo>
+                  <a:pt x="1429282" y="75141"/>
+                  <a:pt x="1434719" y="77537"/>
+                  <a:pt x="1452689" y="97959"/>
+                </a:cubicBezTo>
+                <a:cubicBezTo>
+                  <a:pt x="1521780" y="176481"/>
+                  <a:pt x="1539950" y="425964"/>
+                  <a:pt x="1489256" y="600075"/>
+                </a:cubicBezTo>
+                <a:cubicBezTo>
+                  <a:pt x="1477740" y="639627"/>
+                  <a:pt x="1472400" y="648056"/>
+                  <a:pt x="1467459" y="634480"/>
+                </a:cubicBezTo>
+                <a:cubicBezTo>
+                  <a:pt x="1462266" y="620208"/>
+                  <a:pt x="1457313" y="626105"/>
+                  <a:pt x="1443455" y="663055"/>
+                </a:cubicBezTo>
+                <a:cubicBezTo>
+                  <a:pt x="1372753" y="851572"/>
+                  <a:pt x="1184722" y="1141402"/>
+                  <a:pt x="1044025" y="1278731"/>
+                </a:cubicBezTo>
+                <a:cubicBezTo>
+                  <a:pt x="1013164" y="1308854"/>
+                  <a:pt x="992729" y="1333500"/>
+                  <a:pt x="998614" y="1333500"/>
+                </a:cubicBezTo>
+                <a:cubicBezTo>
+                  <a:pt x="1004500" y="1333500"/>
+                  <a:pt x="1029418" y="1314237"/>
+                  <a:pt x="1053989" y="1290694"/>
+                </a:cubicBezTo>
+                <a:cubicBezTo>
+                  <a:pt x="1104201" y="1242582"/>
+                  <a:pt x="1123165" y="1240914"/>
+                  <a:pt x="1080566" y="1288355"/>
+                </a:cubicBezTo>
+                <a:cubicBezTo>
+                  <a:pt x="997248" y="1381146"/>
+                  <a:pt x="958302" y="1417198"/>
+                  <a:pt x="946339" y="1412607"/>
+                </a:cubicBezTo>
+                <a:cubicBezTo>
+                  <a:pt x="939116" y="1409836"/>
+                  <a:pt x="926832" y="1412859"/>
+                  <a:pt x="919041" y="1419325"/>
+                </a:cubicBezTo>
+                <a:cubicBezTo>
+                  <a:pt x="907788" y="1428664"/>
+                  <a:pt x="901891" y="1428606"/>
+                  <a:pt x="890369" y="1419044"/>
+                </a:cubicBezTo>
+                <a:cubicBezTo>
+                  <a:pt x="878314" y="1409039"/>
+                  <a:pt x="876829" y="1409520"/>
+                  <a:pt x="881577" y="1421895"/>
+                </a:cubicBezTo>
+                <a:cubicBezTo>
+                  <a:pt x="893801" y="1453749"/>
+                  <a:pt x="850392" y="1494284"/>
+                  <a:pt x="833437" y="1466850"/>
+                </a:cubicBezTo>
+                <a:close/>
+                <a:moveTo>
+                  <a:pt x="1001521" y="1289719"/>
+                </a:moveTo>
+                <a:cubicBezTo>
+                  <a:pt x="1041927" y="1247979"/>
+                  <a:pt x="1070386" y="1210699"/>
+                  <a:pt x="1068784" y="1201613"/>
+                </a:cubicBezTo>
+                <a:cubicBezTo>
+                  <a:pt x="1066941" y="1191166"/>
+                  <a:pt x="1068583" y="1189627"/>
+                  <a:pt x="1073661" y="1197044"/>
+                </a:cubicBezTo>
+                <a:cubicBezTo>
+                  <a:pt x="1078884" y="1204674"/>
+                  <a:pt x="1091549" y="1196039"/>
+                  <a:pt x="1113518" y="1169872"/>
+                </a:cubicBezTo>
+                <a:cubicBezTo>
+                  <a:pt x="1134806" y="1144516"/>
+                  <a:pt x="1142068" y="1129260"/>
+                  <a:pt x="1134946" y="1124859"/>
+                </a:cubicBezTo>
+                <a:cubicBezTo>
+                  <a:pt x="1127767" y="1120422"/>
+                  <a:pt x="1133542" y="1107240"/>
+                  <a:pt x="1152249" y="1085356"/>
+                </a:cubicBezTo>
+                <a:cubicBezTo>
+                  <a:pt x="1167691" y="1067292"/>
+                  <a:pt x="1180499" y="1057013"/>
+                  <a:pt x="1180712" y="1062513"/>
+                </a:cubicBezTo>
+                <a:cubicBezTo>
+                  <a:pt x="1180925" y="1068014"/>
+                  <a:pt x="1175742" y="1078523"/>
+                  <a:pt x="1169193" y="1085866"/>
+                </a:cubicBezTo>
+                <a:cubicBezTo>
+                  <a:pt x="1159023" y="1097272"/>
+                  <a:pt x="1159780" y="1097327"/>
+                  <a:pt x="1174389" y="1086245"/>
+                </a:cubicBezTo>
+                <a:cubicBezTo>
+                  <a:pt x="1183795" y="1079110"/>
+                  <a:pt x="1189029" y="1066856"/>
+                  <a:pt x="1186020" y="1059014"/>
+                </a:cubicBezTo>
+                <a:cubicBezTo>
+                  <a:pt x="1183011" y="1051172"/>
+                  <a:pt x="1190663" y="1029356"/>
+                  <a:pt x="1203026" y="1010534"/>
+                </a:cubicBezTo>
+                <a:cubicBezTo>
+                  <a:pt x="1282627" y="889338"/>
+                  <a:pt x="1269158" y="903004"/>
+                  <a:pt x="1135582" y="1078964"/>
+                </a:cubicBezTo>
+                <a:cubicBezTo>
+                  <a:pt x="1009750" y="1244724"/>
+                  <a:pt x="979742" y="1282943"/>
+                  <a:pt x="950118" y="1315178"/>
+                </a:cubicBezTo>
+                <a:cubicBezTo>
+                  <a:pt x="927018" y="1340315"/>
+                  <a:pt x="916617" y="1362075"/>
+                  <a:pt x="927703" y="1362075"/>
+                </a:cubicBezTo>
+                <a:cubicBezTo>
+                  <a:pt x="929781" y="1362075"/>
+                  <a:pt x="962999" y="1329515"/>
+                  <a:pt x="1001521" y="1289719"/>
+                </a:cubicBezTo>
+                <a:close/>
+                <a:moveTo>
+                  <a:pt x="842793" y="1232861"/>
+                </a:moveTo>
+                <a:cubicBezTo>
+                  <a:pt x="857041" y="1214182"/>
+                  <a:pt x="871132" y="1201332"/>
+                  <a:pt x="874107" y="1204307"/>
+                </a:cubicBezTo>
+                <a:cubicBezTo>
+                  <a:pt x="880819" y="1211019"/>
+                  <a:pt x="914400" y="1181537"/>
+                  <a:pt x="914400" y="1168932"/>
+                </a:cubicBezTo>
+                <a:cubicBezTo>
+                  <a:pt x="914400" y="1163864"/>
+                  <a:pt x="907970" y="1165053"/>
+                  <a:pt x="900112" y="1171575"/>
+                </a:cubicBezTo>
+                <a:cubicBezTo>
+                  <a:pt x="873234" y="1193881"/>
+                  <a:pt x="885908" y="1171409"/>
+                  <a:pt x="979360" y="1031061"/>
+                </a:cubicBezTo>
+                <a:cubicBezTo>
+                  <a:pt x="1201198" y="697901"/>
+                  <a:pt x="1288728" y="498262"/>
+                  <a:pt x="1289902" y="322781"/>
+                </a:cubicBezTo>
+                <a:cubicBezTo>
+                  <a:pt x="1290498" y="233522"/>
+                  <a:pt x="1279008" y="214747"/>
+                  <a:pt x="1229335" y="223819"/>
+                </a:cubicBezTo>
+                <a:cubicBezTo>
+                  <a:pt x="1122281" y="243370"/>
+                  <a:pt x="966412" y="397567"/>
+                  <a:pt x="889920" y="559593"/>
+                </a:cubicBezTo>
+                <a:cubicBezTo>
+                  <a:pt x="852428" y="639010"/>
+                  <a:pt x="833594" y="660006"/>
+                  <a:pt x="842927" y="611981"/>
+                </a:cubicBezTo>
+                <a:cubicBezTo>
+                  <a:pt x="847167" y="590161"/>
+                  <a:pt x="846496" y="588968"/>
+                  <a:pt x="838905" y="604837"/>
+                </a:cubicBezTo>
+                <a:cubicBezTo>
+                  <a:pt x="833893" y="615315"/>
+                  <a:pt x="832113" y="641723"/>
+                  <a:pt x="834950" y="663522"/>
+                </a:cubicBezTo>
+                <a:cubicBezTo>
+                  <a:pt x="839387" y="697608"/>
+                  <a:pt x="837139" y="704747"/>
+                  <a:pt x="818893" y="714512"/>
+                </a:cubicBezTo>
+                <a:cubicBezTo>
+                  <a:pt x="801988" y="723559"/>
+                  <a:pt x="795907" y="723247"/>
+                  <a:pt x="788966" y="712977"/>
+                </a:cubicBezTo>
+                <a:cubicBezTo>
+                  <a:pt x="782492" y="703397"/>
+                  <a:pt x="780969" y="704978"/>
+                  <a:pt x="783034" y="719137"/>
+                </a:cubicBezTo>
+                <a:cubicBezTo>
+                  <a:pt x="785343" y="734969"/>
+                  <a:pt x="780181" y="738322"/>
+                  <a:pt x="752475" y="738983"/>
+                </a:cubicBezTo>
+                <a:cubicBezTo>
+                  <a:pt x="710415" y="739988"/>
+                  <a:pt x="698019" y="729217"/>
+                  <a:pt x="619205" y="623172"/>
+                </a:cubicBezTo>
+                <a:cubicBezTo>
+                  <a:pt x="489070" y="448078"/>
+                  <a:pt x="361920" y="385593"/>
+                  <a:pt x="290295" y="461537"/>
+                </a:cubicBezTo>
+                <a:cubicBezTo>
+                  <a:pt x="211176" y="545429"/>
+                  <a:pt x="209136" y="692080"/>
+                  <a:pt x="285416" y="812337"/>
+                </a:cubicBezTo>
+                <a:cubicBezTo>
+                  <a:pt x="301316" y="837403"/>
+                  <a:pt x="314324" y="860430"/>
+                  <a:pt x="314324" y="863509"/>
+                </a:cubicBezTo>
+                <a:cubicBezTo>
+                  <a:pt x="314325" y="874445"/>
+                  <a:pt x="282392" y="842520"/>
+                  <a:pt x="265191" y="814387"/>
+                </a:cubicBezTo>
+                <a:cubicBezTo>
+                  <a:pt x="255583" y="798671"/>
+                  <a:pt x="247705" y="790785"/>
+                  <a:pt x="247685" y="796863"/>
+                </a:cubicBezTo>
+                <a:cubicBezTo>
+                  <a:pt x="247643" y="810066"/>
+                  <a:pt x="313063" y="894214"/>
+                  <a:pt x="338936" y="914235"/>
+                </a:cubicBezTo>
+                <a:cubicBezTo>
+                  <a:pt x="356900" y="928136"/>
+                  <a:pt x="356901" y="928024"/>
+                  <a:pt x="339042" y="907092"/>
+                </a:cubicBezTo>
+                <a:cubicBezTo>
+                  <a:pt x="307473" y="870091"/>
+                  <a:pt x="337389" y="884124"/>
+                  <a:pt x="376685" y="924750"/>
+                </a:cubicBezTo>
+                <a:cubicBezTo>
+                  <a:pt x="414827" y="964183"/>
+                  <a:pt x="622763" y="1135746"/>
+                  <a:pt x="669639" y="1166461"/>
+                </a:cubicBezTo>
+                <a:cubicBezTo>
+                  <a:pt x="683676" y="1175658"/>
+                  <a:pt x="693102" y="1186515"/>
+                  <a:pt x="690585" y="1190587"/>
+                </a:cubicBezTo>
+                <a:cubicBezTo>
+                  <a:pt x="688068" y="1194659"/>
+                  <a:pt x="693463" y="1203834"/>
+                  <a:pt x="702573" y="1210977"/>
+                </a:cubicBezTo>
+                <a:cubicBezTo>
+                  <a:pt x="717562" y="1222727"/>
+                  <a:pt x="717894" y="1222377"/>
+                  <a:pt x="706064" y="1207293"/>
+                </a:cubicBezTo>
+                <a:cubicBezTo>
+                  <a:pt x="684964" y="1180388"/>
+                  <a:pt x="702495" y="1187944"/>
+                  <a:pt x="755424" y="1228569"/>
+                </a:cubicBezTo>
+                <a:cubicBezTo>
+                  <a:pt x="815462" y="1274649"/>
+                  <a:pt x="811084" y="1274434"/>
+                  <a:pt x="842793" y="1232861"/>
+                </a:cubicBezTo>
+                <a:close/>
+                <a:moveTo>
+                  <a:pt x="1114682" y="1232693"/>
+                </a:moveTo>
+                <a:cubicBezTo>
+                  <a:pt x="1114540" y="1227017"/>
+                  <a:pt x="1129248" y="1205586"/>
+                  <a:pt x="1147366" y="1185068"/>
+                </a:cubicBezTo>
+                <a:cubicBezTo>
+                  <a:pt x="1165483" y="1164550"/>
+                  <a:pt x="1180485" y="1153183"/>
+                  <a:pt x="1180703" y="1159808"/>
+                </a:cubicBezTo>
+                <a:cubicBezTo>
+                  <a:pt x="1180921" y="1166433"/>
+                  <a:pt x="1166214" y="1187865"/>
+                  <a:pt x="1148020" y="1207433"/>
+                </a:cubicBezTo>
+                <a:cubicBezTo>
+                  <a:pt x="1129826" y="1227002"/>
+                  <a:pt x="1114824" y="1238368"/>
+                  <a:pt x="1114682" y="1232693"/>
+                </a:cubicBezTo>
+                <a:close/>
+                <a:moveTo>
+                  <a:pt x="499586" y="1172761"/>
+                </a:moveTo>
+                <a:cubicBezTo>
+                  <a:pt x="494609" y="1168174"/>
+                  <a:pt x="443388" y="1127341"/>
+                  <a:pt x="385762" y="1082020"/>
+                </a:cubicBezTo>
+                <a:cubicBezTo>
+                  <a:pt x="292752" y="1008870"/>
+                  <a:pt x="287765" y="1006015"/>
+                  <a:pt x="341350" y="1056590"/>
+                </a:cubicBezTo>
+                <a:cubicBezTo>
+                  <a:pt x="374550" y="1087925"/>
+                  <a:pt x="423842" y="1128583"/>
+                  <a:pt x="450888" y="1146941"/>
+                </a:cubicBezTo>
+                <a:cubicBezTo>
+                  <a:pt x="498876" y="1179514"/>
+                  <a:pt x="517805" y="1189550"/>
+                  <a:pt x="499586" y="1172761"/>
+                </a:cubicBezTo>
+                <a:close/>
+                <a:moveTo>
+                  <a:pt x="983456" y="1083631"/>
+                </a:moveTo>
+                <a:cubicBezTo>
+                  <a:pt x="1003101" y="1060198"/>
+                  <a:pt x="1019175" y="1037867"/>
+                  <a:pt x="1019175" y="1034007"/>
+                </a:cubicBezTo>
+                <a:cubicBezTo>
+                  <a:pt x="1019175" y="1026484"/>
+                  <a:pt x="946846" y="1113102"/>
+                  <a:pt x="925136" y="1146623"/>
+                </a:cubicBezTo>
+                <a:lnTo>
+                  <a:pt x="912061" y="1166812"/>
+                </a:lnTo>
+                <a:lnTo>
+                  <a:pt x="929899" y="1146525"/>
+                </a:lnTo>
+                <a:cubicBezTo>
+                  <a:pt x="939710" y="1135367"/>
+                  <a:pt x="963810" y="1107065"/>
+                  <a:pt x="983456" y="1083631"/>
+                </a:cubicBezTo>
+                <a:close/>
+                <a:moveTo>
+                  <a:pt x="1190625" y="1133465"/>
+                </a:moveTo>
+                <a:cubicBezTo>
+                  <a:pt x="1190625" y="1118106"/>
+                  <a:pt x="1253654" y="1037754"/>
+                  <a:pt x="1260406" y="1044506"/>
+                </a:cubicBezTo>
+                <a:cubicBezTo>
+                  <a:pt x="1266351" y="1050451"/>
+                  <a:pt x="1216254" y="1128284"/>
+                  <a:pt x="1200026" y="1138313"/>
+                </a:cubicBezTo>
+                <a:cubicBezTo>
+                  <a:pt x="1194855" y="1141509"/>
+                  <a:pt x="1190625" y="1139327"/>
+                  <a:pt x="1190625" y="1133465"/>
+                </a:cubicBezTo>
+                <a:close/>
+                <a:moveTo>
+                  <a:pt x="1276606" y="1015536"/>
+                </a:moveTo>
+                <a:cubicBezTo>
+                  <a:pt x="1276188" y="1001848"/>
+                  <a:pt x="1315252" y="942975"/>
+                  <a:pt x="1324751" y="942975"/>
+                </a:cubicBezTo>
+                <a:cubicBezTo>
+                  <a:pt x="1329563" y="942975"/>
+                  <a:pt x="1333384" y="946189"/>
+                  <a:pt x="1333243" y="950118"/>
+                </a:cubicBezTo>
+                <a:cubicBezTo>
+                  <a:pt x="1332863" y="960718"/>
+                  <a:pt x="1276905" y="1025351"/>
+                  <a:pt x="1276606" y="1015536"/>
+                </a:cubicBezTo>
+                <a:close/>
+                <a:moveTo>
+                  <a:pt x="1381125" y="833760"/>
+                </a:moveTo>
+                <a:cubicBezTo>
+                  <a:pt x="1381125" y="821619"/>
+                  <a:pt x="1414244" y="762000"/>
+                  <a:pt x="1420989" y="762000"/>
+                </a:cubicBezTo>
+                <a:cubicBezTo>
+                  <a:pt x="1432977" y="762000"/>
+                  <a:pt x="1430427" y="771325"/>
+                  <a:pt x="1408923" y="806119"/>
+                </a:cubicBezTo>
+                <a:cubicBezTo>
+                  <a:pt x="1390740" y="835540"/>
+                  <a:pt x="1381125" y="845101"/>
+                  <a:pt x="1381125" y="833760"/>
+                </a:cubicBezTo>
+                <a:close/>
+                <a:moveTo>
+                  <a:pt x="1419809" y="746125"/>
+                </a:moveTo>
+                <a:cubicBezTo>
+                  <a:pt x="1420805" y="732605"/>
+                  <a:pt x="1465225" y="642361"/>
+                  <a:pt x="1465912" y="652462"/>
+                </a:cubicBezTo>
+                <a:cubicBezTo>
+                  <a:pt x="1467337" y="673404"/>
+                  <a:pt x="1440534" y="746959"/>
+                  <a:pt x="1430225" y="750395"/>
+                </a:cubicBezTo>
+                <a:cubicBezTo>
+                  <a:pt x="1424175" y="752412"/>
+                  <a:pt x="1419488" y="750490"/>
+                  <a:pt x="1419809" y="746125"/>
+                </a:cubicBezTo>
+                <a:close/>
+                <a:moveTo>
+                  <a:pt x="570987" y="384949"/>
+                </a:moveTo>
+                <a:cubicBezTo>
+                  <a:pt x="552933" y="366167"/>
+                  <a:pt x="525303" y="344528"/>
+                  <a:pt x="509587" y="336863"/>
+                </a:cubicBezTo>
+                <a:lnTo>
+                  <a:pt x="481012" y="322926"/>
+                </a:lnTo>
+                <a:lnTo>
+                  <a:pt x="509573" y="344819"/>
+                </a:lnTo>
+                <a:cubicBezTo>
+                  <a:pt x="525282" y="356860"/>
+                  <a:pt x="550999" y="378374"/>
+                  <a:pt x="566723" y="392627"/>
+                </a:cubicBezTo>
+                <a:cubicBezTo>
+                  <a:pt x="607334" y="429438"/>
+                  <a:pt x="609683" y="425208"/>
+                  <a:pt x="570987" y="384949"/>
+                </a:cubicBezTo>
+                <a:close/>
+                <a:moveTo>
+                  <a:pt x="504825" y="252427"/>
+                </a:moveTo>
+                <a:cubicBezTo>
+                  <a:pt x="481250" y="239812"/>
+                  <a:pt x="437316" y="224446"/>
+                  <a:pt x="407193" y="218281"/>
+                </a:cubicBezTo>
+                <a:cubicBezTo>
+                  <a:pt x="377070" y="212115"/>
+                  <a:pt x="352425" y="203342"/>
+                  <a:pt x="352425" y="198785"/>
+                </a:cubicBezTo>
+                <a:cubicBezTo>
+                  <a:pt x="352425" y="173174"/>
+                  <a:pt x="546977" y="234727"/>
+                  <a:pt x="566653" y="266563"/>
+                </a:cubicBezTo>
+                <a:cubicBezTo>
+                  <a:pt x="576631" y="282709"/>
+                  <a:pt x="550060" y="276633"/>
+                  <a:pt x="504825" y="252427"/>
+                </a:cubicBezTo>
+                <a:close/>
+              </a:path>
+            </a:pathLst>
+          </a:custGeom>
+          <a:solidFill>
+            <a:srgbClr val="CEACD6"/>
+          </a:solidFill>
+          <a:ln>
+            <a:noFill/>
+          </a:ln>
+        </p:spPr>
+      </p:sp>
       <p:pic>
         <p:nvPicPr>
-          <p:cNvPr id="6" name="heart" descr="022.png"/>
+          <p:cNvPr id="7" name="ticket stub" descr="014.png"/>
           <p:cNvPicPr>
             <a:picLocks noChangeAspect="1"/>
           </p:cNvPicPr>
@@ -4826,30 +6518,6 @@
         </p:nvPicPr>
         <p:blipFill>
           <a:blip r:embed="rId6"/>
-          <a:stretch>
-            <a:fillRect/>
-          </a:stretch>
-        </p:blipFill>
-        <p:spPr>
-          <a:xfrm rot="480000">
-            <a:off x="7810500" y="8977312"/>
-            <a:ext cx="1524000" cy="1476375"/>
-          </a:xfrm>
-          <a:prstGeom prst="rect">
-            <a:avLst/>
-          </a:prstGeom>
-        </p:spPr>
-      </p:pic>
-      <p:pic>
-        <p:nvPicPr>
-          <p:cNvPr id="7" name="ticket stub" descr="018.png"/>
-          <p:cNvPicPr>
-            <a:picLocks noChangeAspect="1"/>
-          </p:cNvPicPr>
-          <p:nvPr/>
-        </p:nvPicPr>
-        <p:blipFill>
-          <a:blip r:embed="rId7"/>
           <a:stretch>
             <a:fillRect/>
           </a:stretch>
@@ -4961,9 +6629,2488 @@
           </a:prstGeom>
         </p:spPr>
       </p:pic>
+      <p:sp>
+        <p:nvSpPr>
+          <p:cNvPr id="3" name="burst"/>
+          <p:cNvSpPr/>
+          <p:nvPr/>
+        </p:nvSpPr>
+        <p:spPr>
+          <a:xfrm rot="0">
+            <a:off x="1047750" y="2900362"/>
+            <a:ext cx="8191500" cy="7153275"/>
+          </a:xfrm>
+          <a:custGeom>
+            <a:avLst/>
+            <a:gdLst/>
+            <a:ahLst/>
+            <a:cxnLst/>
+            <a:rect l="0" t="0" r="r" b="b"/>
+            <a:pathLst>
+              <a:path w="8191500" h="7153275">
+                <a:moveTo>
+                  <a:pt x="3969543" y="7112657"/>
+                </a:moveTo>
+                <a:cubicBezTo>
+                  <a:pt x="3960375" y="7090357"/>
+                  <a:pt x="3952875" y="7061028"/>
+                  <a:pt x="3952875" y="7047482"/>
+                </a:cubicBezTo>
+                <a:cubicBezTo>
+                  <a:pt x="3952875" y="7033935"/>
+                  <a:pt x="3946426" y="7009925"/>
+                  <a:pt x="3938545" y="6994127"/>
+                </a:cubicBezTo>
+                <a:cubicBezTo>
+                  <a:pt x="3930663" y="6978328"/>
+                  <a:pt x="3919738" y="6944451"/>
+                  <a:pt x="3914267" y="6918844"/>
+                </a:cubicBezTo>
+                <a:cubicBezTo>
+                  <a:pt x="3893766" y="6822903"/>
+                  <a:pt x="3888428" y="6804218"/>
+                  <a:pt x="3865588" y="6748462"/>
+                </a:cubicBezTo>
+                <a:cubicBezTo>
+                  <a:pt x="3852713" y="6717030"/>
+                  <a:pt x="3832581" y="6659165"/>
+                  <a:pt x="3820852" y="6619875"/>
+                </a:cubicBezTo>
+                <a:cubicBezTo>
+                  <a:pt x="3809122" y="6580584"/>
+                  <a:pt x="3784962" y="6501288"/>
+                  <a:pt x="3767162" y="6443662"/>
+                </a:cubicBezTo>
+                <a:cubicBezTo>
+                  <a:pt x="3749362" y="6386036"/>
+                  <a:pt x="3731924" y="6328171"/>
+                  <a:pt x="3728410" y="6315075"/>
+                </a:cubicBezTo>
+                <a:cubicBezTo>
+                  <a:pt x="3724896" y="6301978"/>
+                  <a:pt x="3716897" y="6284833"/>
+                  <a:pt x="3710634" y="6276975"/>
+                </a:cubicBezTo>
+                <a:cubicBezTo>
+                  <a:pt x="3704371" y="6269116"/>
+                  <a:pt x="3687249" y="6230540"/>
+                  <a:pt x="3672586" y="6191250"/>
+                </a:cubicBezTo>
+                <a:cubicBezTo>
+                  <a:pt x="3581182" y="5946335"/>
+                  <a:pt x="3534727" y="5848350"/>
+                  <a:pt x="3510018" y="5848350"/>
+                </a:cubicBezTo>
+                <a:cubicBezTo>
+                  <a:pt x="3494548" y="5848350"/>
+                  <a:pt x="3450445" y="5909745"/>
+                  <a:pt x="3421068" y="5972175"/>
+                </a:cubicBezTo>
+                <a:cubicBezTo>
+                  <a:pt x="3409975" y="5995749"/>
+                  <a:pt x="3397026" y="6021466"/>
+                  <a:pt x="3392292" y="6029325"/>
+                </a:cubicBezTo>
+                <a:cubicBezTo>
+                  <a:pt x="3387559" y="6037183"/>
+                  <a:pt x="3376659" y="6058614"/>
+                  <a:pt x="3368070" y="6076950"/>
+                </a:cubicBezTo>
+                <a:cubicBezTo>
+                  <a:pt x="3346248" y="6123537"/>
+                  <a:pt x="3286516" y="6240734"/>
+                  <a:pt x="3275832" y="6257925"/>
+                </a:cubicBezTo>
+                <a:cubicBezTo>
+                  <a:pt x="3270949" y="6265783"/>
+                  <a:pt x="3264449" y="6278641"/>
+                  <a:pt x="3261388" y="6286500"/>
+                </a:cubicBezTo>
+                <a:cubicBezTo>
+                  <a:pt x="3258327" y="6294358"/>
+                  <a:pt x="3252456" y="6309360"/>
+                  <a:pt x="3248342" y="6319837"/>
+                </a:cubicBezTo>
+                <a:cubicBezTo>
+                  <a:pt x="3210256" y="6416836"/>
+                  <a:pt x="3155675" y="6510125"/>
+                  <a:pt x="3138355" y="6507823"/>
+                </a:cubicBezTo>
+                <a:cubicBezTo>
+                  <a:pt x="3119155" y="6505271"/>
+                  <a:pt x="3086100" y="6565315"/>
+                  <a:pt x="3086100" y="6602744"/>
+                </a:cubicBezTo>
+                <a:cubicBezTo>
+                  <a:pt x="3086100" y="6611547"/>
+                  <a:pt x="3081813" y="6621399"/>
+                  <a:pt x="3076575" y="6624637"/>
+                </a:cubicBezTo>
+                <a:cubicBezTo>
+                  <a:pt x="3071336" y="6627875"/>
+                  <a:pt x="3067050" y="6640031"/>
+                  <a:pt x="3067050" y="6651651"/>
+                </a:cubicBezTo>
+                <a:cubicBezTo>
+                  <a:pt x="3067050" y="6675659"/>
+                  <a:pt x="3017822" y="6734175"/>
+                  <a:pt x="2997625" y="6734175"/>
+                </a:cubicBezTo>
+                <a:cubicBezTo>
+                  <a:pt x="2960413" y="6734175"/>
+                  <a:pt x="2951070" y="6702121"/>
+                  <a:pt x="2958024" y="6598311"/>
+                </a:cubicBezTo>
+                <a:cubicBezTo>
+                  <a:pt x="2964553" y="6500839"/>
+                  <a:pt x="2964229" y="6498499"/>
+                  <a:pt x="2942050" y="6482977"/>
+                </a:cubicBezTo>
+                <a:cubicBezTo>
+                  <a:pt x="2920836" y="6468130"/>
+                  <a:pt x="2918985" y="6459208"/>
+                  <a:pt x="2912617" y="6341098"/>
+                </a:cubicBezTo>
+                <a:cubicBezTo>
+                  <a:pt x="2908879" y="6271778"/>
+                  <a:pt x="2901748" y="6161484"/>
+                  <a:pt x="2896770" y="6096000"/>
+                </a:cubicBezTo>
+                <a:cubicBezTo>
+                  <a:pt x="2891792" y="6030515"/>
+                  <a:pt x="2884706" y="5912643"/>
+                  <a:pt x="2881023" y="5834062"/>
+                </a:cubicBezTo>
+                <a:cubicBezTo>
+                  <a:pt x="2877339" y="5755481"/>
+                  <a:pt x="2871818" y="5686982"/>
+                  <a:pt x="2868753" y="5681843"/>
+                </a:cubicBezTo>
+                <a:cubicBezTo>
+                  <a:pt x="2863562" y="5673138"/>
+                  <a:pt x="2858214" y="5615560"/>
+                  <a:pt x="2840542" y="5378093"/>
+                </a:cubicBezTo>
+                <a:lnTo>
+                  <a:pt x="2833545" y="5284073"/>
+                </a:lnTo>
+                <a:lnTo>
+                  <a:pt x="2796310" y="5251886"/>
+                </a:lnTo>
+                <a:cubicBezTo>
+                  <a:pt x="2747586" y="5209768"/>
+                  <a:pt x="2705160" y="5208692"/>
+                  <a:pt x="2647002" y="5248101"/>
+                </a:cubicBezTo>
+                <a:cubicBezTo>
+                  <a:pt x="2623949" y="5263722"/>
+                  <a:pt x="2595828" y="5276581"/>
+                  <a:pt x="2584511" y="5276676"/>
+                </a:cubicBezTo>
+                <a:cubicBezTo>
+                  <a:pt x="2573194" y="5276772"/>
+                  <a:pt x="2536761" y="5289705"/>
+                  <a:pt x="2503548" y="5305417"/>
+                </a:cubicBezTo>
+                <a:cubicBezTo>
+                  <a:pt x="2470336" y="5321129"/>
+                  <a:pt x="2437682" y="5333988"/>
+                  <a:pt x="2430984" y="5333992"/>
+                </a:cubicBezTo>
+                <a:cubicBezTo>
+                  <a:pt x="2420650" y="5333998"/>
+                  <a:pt x="2353603" y="5366469"/>
+                  <a:pt x="2293143" y="5400749"/>
+                </a:cubicBezTo>
+                <a:cubicBezTo>
+                  <a:pt x="2283975" y="5405947"/>
+                  <a:pt x="2270494" y="5413414"/>
+                  <a:pt x="2263185" y="5417343"/>
+                </a:cubicBezTo>
+                <a:cubicBezTo>
+                  <a:pt x="2226891" y="5436853"/>
+                  <a:pt x="1866335" y="5684465"/>
+                  <a:pt x="1795310" y="5738657"/>
+                </a:cubicBezTo>
+                <a:cubicBezTo>
+                  <a:pt x="1750569" y="5772794"/>
+                  <a:pt x="1710462" y="5800725"/>
+                  <a:pt x="1706183" y="5800725"/>
+                </a:cubicBezTo>
+                <a:cubicBezTo>
+                  <a:pt x="1701903" y="5800725"/>
+                  <a:pt x="1690589" y="5809358"/>
+                  <a:pt x="1681040" y="5819909"/>
+                </a:cubicBezTo>
+                <a:cubicBezTo>
+                  <a:pt x="1666037" y="5836488"/>
+                  <a:pt x="1620646" y="5869760"/>
+                  <a:pt x="1538287" y="5924550"/>
+                </a:cubicBezTo>
+                <a:cubicBezTo>
+                  <a:pt x="1472428" y="5968362"/>
+                  <a:pt x="1405459" y="6016623"/>
+                  <a:pt x="1333500" y="6072126"/>
+                </a:cubicBezTo>
+                <a:cubicBezTo>
+                  <a:pt x="1252604" y="6134521"/>
+                  <a:pt x="1015724" y="6308093"/>
+                  <a:pt x="922154" y="6373535"/>
+                </a:cubicBezTo>
+                <a:cubicBezTo>
+                  <a:pt x="882509" y="6401263"/>
+                  <a:pt x="869335" y="6406137"/>
+                  <a:pt x="856204" y="6397936"/>
+                </a:cubicBezTo>
+                <a:cubicBezTo>
+                  <a:pt x="836351" y="6385538"/>
+                  <a:pt x="773635" y="6423089"/>
+                  <a:pt x="746015" y="6463912"/>
+                </a:cubicBezTo>
+                <a:cubicBezTo>
+                  <a:pt x="722553" y="6498589"/>
+                  <a:pt x="662985" y="6556244"/>
+                  <a:pt x="602853" y="6602473"/>
+                </a:cubicBezTo>
+                <a:cubicBezTo>
+                  <a:pt x="561711" y="6634104"/>
+                  <a:pt x="548432" y="6639556"/>
+                  <a:pt x="525044" y="6634419"/>
+                </a:cubicBezTo>
+                <a:cubicBezTo>
+                  <a:pt x="505557" y="6630139"/>
+                  <a:pt x="484949" y="6634293"/>
+                  <a:pt x="458351" y="6647862"/>
+                </a:cubicBezTo>
+                <a:cubicBezTo>
+                  <a:pt x="405364" y="6674894"/>
+                  <a:pt x="386162" y="6672699"/>
+                  <a:pt x="363576" y="6637026"/>
+                </a:cubicBezTo>
+                <a:cubicBezTo>
+                  <a:pt x="347600" y="6611794"/>
+                  <a:pt x="346210" y="6602905"/>
+                  <a:pt x="355496" y="6585350"/>
+                </a:cubicBezTo>
+                <a:cubicBezTo>
+                  <a:pt x="380917" y="6537294"/>
+                  <a:pt x="469159" y="6440781"/>
+                  <a:pt x="542488" y="6380831"/>
+                </a:cubicBezTo>
+                <a:cubicBezTo>
+                  <a:pt x="559126" y="6367230"/>
+                  <a:pt x="577863" y="6341193"/>
+                  <a:pt x="584127" y="6322973"/>
+                </a:cubicBezTo>
+                <a:cubicBezTo>
+                  <a:pt x="596524" y="6286913"/>
+                  <a:pt x="635217" y="6238208"/>
+                  <a:pt x="766762" y="6093085"/>
+                </a:cubicBezTo>
+                <a:cubicBezTo>
+                  <a:pt x="813911" y="6041069"/>
+                  <a:pt x="867060" y="5978654"/>
+                  <a:pt x="884871" y="5954386"/>
+                </a:cubicBezTo>
+                <a:cubicBezTo>
+                  <a:pt x="926108" y="5898199"/>
+                  <a:pt x="1019294" y="5791364"/>
+                  <a:pt x="1123404" y="5680917"/>
+                </a:cubicBezTo>
+                <a:cubicBezTo>
+                  <a:pt x="1168233" y="5633358"/>
+                  <a:pt x="1238235" y="5551919"/>
+                  <a:pt x="1278962" y="5499942"/>
+                </a:cubicBezTo>
+                <a:cubicBezTo>
+                  <a:pt x="1319690" y="5447964"/>
+                  <a:pt x="1380606" y="5373290"/>
+                  <a:pt x="1414333" y="5334000"/>
+                </a:cubicBezTo>
+                <a:cubicBezTo>
+                  <a:pt x="1448059" y="5294709"/>
+                  <a:pt x="1475816" y="5258680"/>
+                  <a:pt x="1476014" y="5253936"/>
+                </a:cubicBezTo>
+                <a:cubicBezTo>
+                  <a:pt x="1476212" y="5249192"/>
+                  <a:pt x="1487090" y="5231261"/>
+                  <a:pt x="1500187" y="5214090"/>
+                </a:cubicBezTo>
+                <a:cubicBezTo>
+                  <a:pt x="1513284" y="5196919"/>
+                  <a:pt x="1524000" y="5179766"/>
+                  <a:pt x="1524000" y="5175971"/>
+                </a:cubicBezTo>
+                <a:cubicBezTo>
+                  <a:pt x="1524000" y="5172176"/>
+                  <a:pt x="1540578" y="5147244"/>
+                  <a:pt x="1560840" y="5120567"/>
+                </a:cubicBezTo>
+                <a:cubicBezTo>
+                  <a:pt x="1581102" y="5093889"/>
+                  <a:pt x="1605564" y="5059203"/>
+                  <a:pt x="1615200" y="5043487"/>
+                </a:cubicBezTo>
+                <a:cubicBezTo>
+                  <a:pt x="1624836" y="5027771"/>
+                  <a:pt x="1642548" y="5002796"/>
+                  <a:pt x="1654560" y="4987987"/>
+                </a:cubicBezTo>
+                <a:cubicBezTo>
+                  <a:pt x="1666572" y="4973179"/>
+                  <a:pt x="1676400" y="4955036"/>
+                  <a:pt x="1676399" y="4947670"/>
+                </a:cubicBezTo>
+                <a:cubicBezTo>
+                  <a:pt x="1676399" y="4930395"/>
+                  <a:pt x="1760487" y="4753219"/>
+                  <a:pt x="1778689" y="4732143"/>
+                </a:cubicBezTo>
+                <a:cubicBezTo>
+                  <a:pt x="1804853" y="4701847"/>
+                  <a:pt x="1782333" y="4696161"/>
+                  <a:pt x="1730942" y="4720087"/>
+                </a:cubicBezTo>
+                <a:cubicBezTo>
+                  <a:pt x="1703563" y="4732834"/>
+                  <a:pt x="1672590" y="4743396"/>
+                  <a:pt x="1662112" y="4743557"/>
+                </a:cubicBezTo>
+                <a:cubicBezTo>
+                  <a:pt x="1651635" y="4743719"/>
+                  <a:pt x="1613058" y="4754458"/>
+                  <a:pt x="1576387" y="4767421"/>
+                </a:cubicBezTo>
+                <a:cubicBezTo>
+                  <a:pt x="1539716" y="4780385"/>
+                  <a:pt x="1489106" y="4791010"/>
+                  <a:pt x="1463920" y="4791033"/>
+                </a:cubicBezTo>
+                <a:cubicBezTo>
+                  <a:pt x="1433722" y="4791060"/>
+                  <a:pt x="1404529" y="4798657"/>
+                  <a:pt x="1378195" y="4813342"/>
+                </a:cubicBezTo>
+                <a:cubicBezTo>
+                  <a:pt x="1356232" y="4825590"/>
+                  <a:pt x="1327546" y="4838014"/>
+                  <a:pt x="1314450" y="4840952"/>
+                </a:cubicBezTo>
+                <a:cubicBezTo>
+                  <a:pt x="1283755" y="4847838"/>
+                  <a:pt x="1237697" y="4864359"/>
+                  <a:pt x="1169013" y="4893120"/>
+                </a:cubicBezTo>
+                <a:cubicBezTo>
+                  <a:pt x="1047420" y="4944037"/>
+                  <a:pt x="1019674" y="4898022"/>
+                  <a:pt x="1115892" y="4805023"/>
+                </a:cubicBezTo>
+                <a:cubicBezTo>
+                  <a:pt x="1149137" y="4772890"/>
+                  <a:pt x="1197768" y="4719536"/>
+                  <a:pt x="1223962" y="4686458"/>
+                </a:cubicBezTo>
+                <a:cubicBezTo>
+                  <a:pt x="1250156" y="4653380"/>
+                  <a:pt x="1283374" y="4613765"/>
+                  <a:pt x="1297781" y="4598425"/>
+                </a:cubicBezTo>
+                <a:cubicBezTo>
+                  <a:pt x="1312187" y="4583085"/>
+                  <a:pt x="1323975" y="4563177"/>
+                  <a:pt x="1323974" y="4554186"/>
+                </a:cubicBezTo>
+                <a:cubicBezTo>
+                  <a:pt x="1323974" y="4545194"/>
+                  <a:pt x="1344905" y="4513084"/>
+                  <a:pt x="1370486" y="4482829"/>
+                </a:cubicBezTo>
+                <a:cubicBezTo>
+                  <a:pt x="1472832" y="4361785"/>
+                  <a:pt x="1497466" y="4277309"/>
+                  <a:pt x="1448415" y="4215586"/>
+                </a:cubicBezTo>
+                <a:cubicBezTo>
+                  <a:pt x="1433037" y="4196236"/>
+                  <a:pt x="1419107" y="4177430"/>
+                  <a:pt x="1417458" y="4173795"/>
+                </a:cubicBezTo>
+                <a:cubicBezTo>
+                  <a:pt x="1397224" y="4129172"/>
+                  <a:pt x="1151820" y="4021112"/>
+                  <a:pt x="947737" y="3966960"/>
+                </a:cubicBezTo>
+                <a:cubicBezTo>
+                  <a:pt x="845609" y="3939861"/>
+                  <a:pt x="805109" y="3928795"/>
+                  <a:pt x="752475" y="3913604"/>
+                </a:cubicBezTo>
+                <a:cubicBezTo>
+                  <a:pt x="672113" y="3890412"/>
+                  <a:pt x="633988" y="3885619"/>
+                  <a:pt x="485775" y="3880079"/>
+                </a:cubicBezTo>
+                <a:cubicBezTo>
+                  <a:pt x="393086" y="3876614"/>
+                  <a:pt x="323103" y="3869826"/>
+                  <a:pt x="315183" y="3863533"/>
+                </a:cubicBezTo>
+                <a:cubicBezTo>
+                  <a:pt x="307233" y="3857215"/>
+                  <a:pt x="258659" y="3852567"/>
+                  <a:pt x="196121" y="3852140"/>
+                </a:cubicBezTo>
+                <a:cubicBezTo>
+                  <a:pt x="33623" y="3851029"/>
+                  <a:pt x="0" y="3843174"/>
+                  <a:pt x="0" y="3806323"/>
+                </a:cubicBezTo>
+                <a:cubicBezTo>
+                  <a:pt x="0" y="3782191"/>
+                  <a:pt x="5592" y="3774074"/>
+                  <a:pt x="29519" y="3763483"/>
+                </a:cubicBezTo>
+                <a:cubicBezTo>
+                  <a:pt x="77449" y="3742267"/>
+                  <a:pt x="143758" y="3724297"/>
+                  <a:pt x="175345" y="3723964"/>
+                </a:cubicBezTo>
+                <a:cubicBezTo>
+                  <a:pt x="204254" y="3723658"/>
+                  <a:pt x="299231" y="3694918"/>
+                  <a:pt x="311337" y="3682812"/>
+                </a:cubicBezTo>
+                <a:cubicBezTo>
+                  <a:pt x="314726" y="3679423"/>
+                  <a:pt x="326225" y="3676649"/>
+                  <a:pt x="336890" y="3676650"/>
+                </a:cubicBezTo>
+                <a:cubicBezTo>
+                  <a:pt x="347554" y="3676650"/>
+                  <a:pt x="369343" y="3664176"/>
+                  <a:pt x="385309" y="3648930"/>
+                </a:cubicBezTo>
+                <a:cubicBezTo>
+                  <a:pt x="415738" y="3619873"/>
+                  <a:pt x="458347" y="3592727"/>
+                  <a:pt x="514350" y="3566721"/>
+                </a:cubicBezTo>
+                <a:cubicBezTo>
+                  <a:pt x="532685" y="3558206"/>
+                  <a:pt x="554116" y="3547282"/>
+                  <a:pt x="561975" y="3542446"/>
+                </a:cubicBezTo>
+                <a:cubicBezTo>
+                  <a:pt x="569833" y="3537610"/>
+                  <a:pt x="582691" y="3530686"/>
+                  <a:pt x="590550" y="3527059"/>
+                </a:cubicBezTo>
+                <a:cubicBezTo>
+                  <a:pt x="598408" y="3523432"/>
+                  <a:pt x="644743" y="3495599"/>
+                  <a:pt x="693518" y="3465207"/>
+                </a:cubicBezTo>
+                <a:cubicBezTo>
+                  <a:pt x="742292" y="3434815"/>
+                  <a:pt x="783958" y="3409950"/>
+                  <a:pt x="786108" y="3409950"/>
+                </a:cubicBezTo>
+                <a:cubicBezTo>
+                  <a:pt x="793222" y="3409950"/>
+                  <a:pt x="881000" y="3348177"/>
+                  <a:pt x="884237" y="3340893"/>
+                </a:cubicBezTo>
+                <a:cubicBezTo>
+                  <a:pt x="885983" y="3336964"/>
+                  <a:pt x="892413" y="3333635"/>
+                  <a:pt x="898525" y="3333495"/>
+                </a:cubicBezTo>
+                <a:cubicBezTo>
+                  <a:pt x="909369" y="3333247"/>
+                  <a:pt x="1005504" y="3258848"/>
+                  <a:pt x="1084355" y="3189681"/>
+                </a:cubicBezTo>
+                <a:cubicBezTo>
+                  <a:pt x="1131325" y="3148480"/>
+                  <a:pt x="1249713" y="3012241"/>
+                  <a:pt x="1319213" y="2919412"/>
+                </a:cubicBezTo>
+                <a:cubicBezTo>
+                  <a:pt x="1358182" y="2867363"/>
+                  <a:pt x="1370467" y="2842375"/>
+                  <a:pt x="1375220" y="2805497"/>
+                </a:cubicBezTo>
+                <a:cubicBezTo>
+                  <a:pt x="1378568" y="2779515"/>
+                  <a:pt x="1385552" y="2754012"/>
+                  <a:pt x="1390741" y="2748823"/>
+                </a:cubicBezTo>
+                <a:cubicBezTo>
+                  <a:pt x="1395929" y="2743635"/>
+                  <a:pt x="1400175" y="2715054"/>
+                  <a:pt x="1400174" y="2685311"/>
+                </a:cubicBezTo>
+                <a:cubicBezTo>
+                  <a:pt x="1400174" y="2647840"/>
+                  <a:pt x="1404757" y="2627429"/>
+                  <a:pt x="1415095" y="2618849"/>
+                </a:cubicBezTo>
+                <a:cubicBezTo>
+                  <a:pt x="1430569" y="2606007"/>
+                  <a:pt x="1428850" y="2461679"/>
+                  <a:pt x="1412916" y="2435898"/>
+                </a:cubicBezTo>
+                <a:cubicBezTo>
+                  <a:pt x="1409146" y="2429799"/>
+                  <a:pt x="1402842" y="2407507"/>
+                  <a:pt x="1398907" y="2386360"/>
+                </a:cubicBezTo>
+                <a:cubicBezTo>
+                  <a:pt x="1373723" y="2251043"/>
+                  <a:pt x="1358091" y="2201472"/>
+                  <a:pt x="1298840" y="2069045"/>
+                </a:cubicBezTo>
+                <a:cubicBezTo>
+                  <a:pt x="1286470" y="2041399"/>
+                  <a:pt x="1276350" y="2016487"/>
+                  <a:pt x="1276350" y="2013687"/>
+                </a:cubicBezTo>
+                <a:cubicBezTo>
+                  <a:pt x="1276350" y="2007260"/>
+                  <a:pt x="1230471" y="1905090"/>
+                  <a:pt x="1218991" y="1885950"/>
+                </a:cubicBezTo>
+                <a:cubicBezTo>
+                  <a:pt x="1202622" y="1858659"/>
+                  <a:pt x="1120162" y="1709596"/>
+                  <a:pt x="1107874" y="1685084"/>
+                </a:cubicBezTo>
+                <a:cubicBezTo>
+                  <a:pt x="1101077" y="1671524"/>
+                  <a:pt x="1086912" y="1652643"/>
+                  <a:pt x="1076395" y="1643126"/>
+                </a:cubicBezTo>
+                <a:cubicBezTo>
+                  <a:pt x="1065879" y="1633609"/>
+                  <a:pt x="1057275" y="1619771"/>
+                  <a:pt x="1057275" y="1612375"/>
+                </a:cubicBezTo>
+                <a:cubicBezTo>
+                  <a:pt x="1057275" y="1595402"/>
+                  <a:pt x="1034753" y="1564899"/>
+                  <a:pt x="892894" y="1389745"/>
+                </a:cubicBezTo>
+                <a:cubicBezTo>
+                  <a:pt x="852390" y="1339734"/>
+                  <a:pt x="849497" y="1285875"/>
+                  <a:pt x="887315" y="1285875"/>
+                </a:cubicBezTo>
+                <a:cubicBezTo>
+                  <a:pt x="901247" y="1285874"/>
+                  <a:pt x="1038764" y="1381232"/>
+                  <a:pt x="1089261" y="1425909"/>
+                </a:cubicBezTo>
+                <a:cubicBezTo>
+                  <a:pt x="1114712" y="1448426"/>
+                  <a:pt x="1143786" y="1466850"/>
+                  <a:pt x="1153871" y="1466850"/>
+                </a:cubicBezTo>
+                <a:cubicBezTo>
+                  <a:pt x="1172701" y="1466850"/>
+                  <a:pt x="1238700" y="1497672"/>
+                  <a:pt x="1314450" y="1541841"/>
+                </a:cubicBezTo>
+                <a:cubicBezTo>
+                  <a:pt x="1366079" y="1571946"/>
+                  <a:pt x="1422543" y="1595841"/>
+                  <a:pt x="1585912" y="1656724"/>
+                </a:cubicBezTo>
+                <a:cubicBezTo>
+                  <a:pt x="1800271" y="1736608"/>
+                  <a:pt x="1902755" y="1756894"/>
+                  <a:pt x="2057400" y="1750053"/>
+                </a:cubicBezTo>
+                <a:cubicBezTo>
+                  <a:pt x="2145707" y="1746147"/>
+                  <a:pt x="2167208" y="1741808"/>
+                  <a:pt x="2259285" y="1709316"/>
+                </a:cubicBezTo>
+                <a:cubicBezTo>
+                  <a:pt x="2300541" y="1694758"/>
+                  <a:pt x="2306396" y="1694726"/>
+                  <a:pt x="2334823" y="1708907"/>
+                </a:cubicBezTo>
+                <a:cubicBezTo>
+                  <a:pt x="2370598" y="1726754"/>
+                  <a:pt x="2402690" y="1710565"/>
+                  <a:pt x="2485990" y="1632647"/>
+                </a:cubicBezTo>
+                <a:cubicBezTo>
+                  <a:pt x="2510087" y="1610107"/>
+                  <a:pt x="2541407" y="1587254"/>
+                  <a:pt x="2555590" y="1581861"/>
+                </a:cubicBezTo>
+                <a:cubicBezTo>
+                  <a:pt x="2570478" y="1576201"/>
+                  <a:pt x="2587018" y="1558883"/>
+                  <a:pt x="2594726" y="1540885"/>
+                </a:cubicBezTo>
+                <a:cubicBezTo>
+                  <a:pt x="2646059" y="1421024"/>
+                  <a:pt x="2657475" y="1391108"/>
+                  <a:pt x="2657475" y="1376449"/>
+                </a:cubicBezTo>
+                <a:cubicBezTo>
+                  <a:pt x="2657475" y="1367330"/>
+                  <a:pt x="2663690" y="1340005"/>
+                  <a:pt x="2671287" y="1315728"/>
+                </a:cubicBezTo>
+                <a:cubicBezTo>
+                  <a:pt x="2695033" y="1239847"/>
+                  <a:pt x="2703467" y="1198276"/>
+                  <a:pt x="2714061" y="1104900"/>
+                </a:cubicBezTo>
+                <a:cubicBezTo>
+                  <a:pt x="2719708" y="1055131"/>
+                  <a:pt x="2728345" y="988695"/>
+                  <a:pt x="2733256" y="957262"/>
+                </a:cubicBezTo>
+                <a:cubicBezTo>
+                  <a:pt x="2747094" y="868686"/>
+                  <a:pt x="2750119" y="821481"/>
+                  <a:pt x="2757365" y="581025"/>
+                </a:cubicBezTo>
+                <a:cubicBezTo>
+                  <a:pt x="2763405" y="380539"/>
+                  <a:pt x="2766058" y="354416"/>
+                  <a:pt x="2782788" y="330623"/>
+                </a:cubicBezTo>
+                <a:cubicBezTo>
+                  <a:pt x="2800169" y="305905"/>
+                  <a:pt x="2800637" y="299115"/>
+                  <a:pt x="2789518" y="232946"/>
+                </a:cubicBezTo>
+                <a:cubicBezTo>
+                  <a:pt x="2778993" y="170303"/>
+                  <a:pt x="2779499" y="156449"/>
+                  <a:pt x="2793769" y="116635"/>
+                </a:cubicBezTo>
+                <a:cubicBezTo>
+                  <a:pt x="2802679" y="91776"/>
+                  <a:pt x="2809948" y="63830"/>
+                  <a:pt x="2809922" y="54532"/>
+                </a:cubicBezTo>
+                <a:cubicBezTo>
+                  <a:pt x="2809869" y="35548"/>
+                  <a:pt x="2849657" y="16638"/>
+                  <a:pt x="2871787" y="25130"/>
+                </a:cubicBezTo>
+                <a:cubicBezTo>
+                  <a:pt x="2879735" y="28180"/>
+                  <a:pt x="2889050" y="41990"/>
+                  <a:pt x="2892486" y="55819"/>
+                </a:cubicBezTo>
+                <a:cubicBezTo>
+                  <a:pt x="2895922" y="69648"/>
+                  <a:pt x="2907101" y="92335"/>
+                  <a:pt x="2917327" y="106235"/>
+                </a:cubicBezTo>
+                <a:cubicBezTo>
+                  <a:pt x="2935367" y="130756"/>
+                  <a:pt x="2947483" y="173797"/>
+                  <a:pt x="2958474" y="252412"/>
+                </a:cubicBezTo>
+                <a:cubicBezTo>
+                  <a:pt x="2961404" y="273367"/>
+                  <a:pt x="2967841" y="301277"/>
+                  <a:pt x="2972778" y="314435"/>
+                </a:cubicBezTo>
+                <a:cubicBezTo>
+                  <a:pt x="2977715" y="327593"/>
+                  <a:pt x="2985537" y="359740"/>
+                  <a:pt x="2990161" y="385873"/>
+                </a:cubicBezTo>
+                <a:cubicBezTo>
+                  <a:pt x="3003834" y="463154"/>
+                  <a:pt x="3039152" y="602436"/>
+                  <a:pt x="3053616" y="636116"/>
+                </a:cubicBezTo>
+                <a:cubicBezTo>
+                  <a:pt x="3061005" y="653320"/>
+                  <a:pt x="3067050" y="677713"/>
+                  <a:pt x="3067050" y="690323"/>
+                </a:cubicBezTo>
+                <a:cubicBezTo>
+                  <a:pt x="3067050" y="702933"/>
+                  <a:pt x="3071336" y="715899"/>
+                  <a:pt x="3076575" y="719137"/>
+                </a:cubicBezTo>
+                <a:cubicBezTo>
+                  <a:pt x="3081813" y="722375"/>
+                  <a:pt x="3086100" y="735341"/>
+                  <a:pt x="3086100" y="747951"/>
+                </a:cubicBezTo>
+                <a:cubicBezTo>
+                  <a:pt x="3086100" y="760561"/>
+                  <a:pt x="3092125" y="784954"/>
+                  <a:pt x="3099489" y="802158"/>
+                </a:cubicBezTo>
+                <a:cubicBezTo>
+                  <a:pt x="3114761" y="837834"/>
+                  <a:pt x="3181480" y="1048338"/>
+                  <a:pt x="3181401" y="1060597"/>
+                </a:cubicBezTo>
+                <a:cubicBezTo>
+                  <a:pt x="3181252" y="1083943"/>
+                  <a:pt x="3252890" y="1228922"/>
+                  <a:pt x="3298017" y="1296601"/>
+                </a:cubicBezTo>
+                <a:cubicBezTo>
+                  <a:pt x="3317670" y="1326074"/>
+                  <a:pt x="3333750" y="1353014"/>
+                  <a:pt x="3333750" y="1356467"/>
+                </a:cubicBezTo>
+                <a:cubicBezTo>
+                  <a:pt x="3333750" y="1371884"/>
+                  <a:pt x="3460965" y="1533968"/>
+                  <a:pt x="3507922" y="1578378"/>
+                </a:cubicBezTo>
+                <a:cubicBezTo>
+                  <a:pt x="3555589" y="1623459"/>
+                  <a:pt x="3564795" y="1628105"/>
+                  <a:pt x="3618497" y="1634181"/>
+                </a:cubicBezTo>
+                <a:cubicBezTo>
+                  <a:pt x="3650715" y="1637826"/>
+                  <a:pt x="3679376" y="1644530"/>
+                  <a:pt x="3682187" y="1649079"/>
+                </a:cubicBezTo>
+                <a:cubicBezTo>
+                  <a:pt x="3689960" y="1661656"/>
+                  <a:pt x="3735459" y="1658851"/>
+                  <a:pt x="3763835" y="1644046"/>
+                </a:cubicBezTo>
+                <a:cubicBezTo>
+                  <a:pt x="3777735" y="1636793"/>
+                  <a:pt x="3805175" y="1625557"/>
+                  <a:pt x="3824812" y="1619076"/>
+                </a:cubicBezTo>
+                <a:cubicBezTo>
+                  <a:pt x="3844449" y="1612595"/>
+                  <a:pt x="3878082" y="1594904"/>
+                  <a:pt x="3899551" y="1579762"/>
+                </a:cubicBezTo>
+                <a:cubicBezTo>
+                  <a:pt x="3921021" y="1564619"/>
+                  <a:pt x="3960624" y="1537198"/>
+                  <a:pt x="3987557" y="1518826"/>
+                </a:cubicBezTo>
+                <a:cubicBezTo>
+                  <a:pt x="4071593" y="1461503"/>
+                  <a:pt x="4294109" y="1206320"/>
+                  <a:pt x="4376737" y="1072511"/>
+                </a:cubicBezTo>
+                <a:cubicBezTo>
+                  <a:pt x="4394604" y="1043577"/>
+                  <a:pt x="4459343" y="952094"/>
+                  <a:pt x="4478011" y="929401"/>
+                </a:cubicBezTo>
+                <a:cubicBezTo>
+                  <a:pt x="4482644" y="923769"/>
+                  <a:pt x="4526084" y="863441"/>
+                  <a:pt x="4574546" y="795337"/>
+                </a:cubicBezTo>
+                <a:cubicBezTo>
+                  <a:pt x="4629903" y="717542"/>
+                  <a:pt x="4669707" y="670483"/>
+                  <a:pt x="4681622" y="668744"/>
+                </a:cubicBezTo>
+                <a:cubicBezTo>
+                  <a:pt x="4693429" y="667021"/>
+                  <a:pt x="4723669" y="631745"/>
+                  <a:pt x="4761742" y="575280"/>
+                </a:cubicBezTo>
+                <a:cubicBezTo>
+                  <a:pt x="4795378" y="525397"/>
+                  <a:pt x="4833954" y="478795"/>
+                  <a:pt x="4847467" y="471719"/>
+                </a:cubicBezTo>
+                <a:cubicBezTo>
+                  <a:pt x="4870141" y="459847"/>
+                  <a:pt x="4890350" y="428426"/>
+                  <a:pt x="4948839" y="314105"/>
+                </a:cubicBezTo>
+                <a:cubicBezTo>
+                  <a:pt x="5001112" y="211933"/>
+                  <a:pt x="5050500" y="189224"/>
+                  <a:pt x="5055963" y="264848"/>
+                </a:cubicBezTo>
+                <a:cubicBezTo>
+                  <a:pt x="5058286" y="297008"/>
+                  <a:pt x="5051973" y="318259"/>
+                  <a:pt x="5026276" y="364778"/>
+                </a:cubicBezTo>
+                <a:cubicBezTo>
+                  <a:pt x="4988383" y="433378"/>
+                  <a:pt x="4930586" y="622096"/>
+                  <a:pt x="4939179" y="649170"/>
+                </a:cubicBezTo>
+                <a:cubicBezTo>
+                  <a:pt x="4942407" y="659342"/>
+                  <a:pt x="4940947" y="672816"/>
+                  <a:pt x="4935933" y="679113"/>
+                </a:cubicBezTo>
+                <a:cubicBezTo>
+                  <a:pt x="4930920" y="685410"/>
+                  <a:pt x="4924447" y="703421"/>
+                  <a:pt x="4921550" y="719137"/>
+                </a:cubicBezTo>
+                <a:cubicBezTo>
+                  <a:pt x="4918653" y="734853"/>
+                  <a:pt x="4911229" y="768581"/>
+                  <a:pt x="4905053" y="794088"/>
+                </a:cubicBezTo>
+                <a:cubicBezTo>
+                  <a:pt x="4897573" y="824982"/>
+                  <a:pt x="4896891" y="847241"/>
+                  <a:pt x="4903011" y="860763"/>
+                </a:cubicBezTo>
+                <a:cubicBezTo>
+                  <a:pt x="4911844" y="880279"/>
+                  <a:pt x="4909013" y="910666"/>
+                  <a:pt x="4887809" y="1023937"/>
+                </a:cubicBezTo>
+                <a:cubicBezTo>
+                  <a:pt x="4882905" y="1050131"/>
+                  <a:pt x="4880596" y="1074417"/>
+                  <a:pt x="4882677" y="1077906"/>
+                </a:cubicBezTo>
+                <a:cubicBezTo>
+                  <a:pt x="4884758" y="1081396"/>
+                  <a:pt x="4882256" y="1095309"/>
+                  <a:pt x="4877118" y="1108825"/>
+                </a:cubicBezTo>
+                <a:cubicBezTo>
+                  <a:pt x="4871979" y="1122340"/>
+                  <a:pt x="4865183" y="1177231"/>
+                  <a:pt x="4862016" y="1230804"/>
+                </a:cubicBezTo>
+                <a:cubicBezTo>
+                  <a:pt x="4858848" y="1284377"/>
+                  <a:pt x="4854258" y="1331442"/>
+                  <a:pt x="4851816" y="1335394"/>
+                </a:cubicBezTo>
+                <a:cubicBezTo>
+                  <a:pt x="4832968" y="1365891"/>
+                  <a:pt x="4832380" y="1863900"/>
+                  <a:pt x="4851130" y="1916728"/>
+                </a:cubicBezTo>
+                <a:cubicBezTo>
+                  <a:pt x="4868487" y="1965634"/>
+                  <a:pt x="4869976" y="1966206"/>
+                  <a:pt x="4909740" y="1939221"/>
+                </a:cubicBezTo>
+                <a:cubicBezTo>
+                  <a:pt x="4929086" y="1926093"/>
+                  <a:pt x="4953993" y="1912470"/>
+                  <a:pt x="4965088" y="1908948"/>
+                </a:cubicBezTo>
+                <a:cubicBezTo>
+                  <a:pt x="4976183" y="1905427"/>
+                  <a:pt x="5005819" y="1888096"/>
+                  <a:pt x="5030945" y="1870435"/>
+                </a:cubicBezTo>
+                <a:cubicBezTo>
+                  <a:pt x="5056071" y="1852774"/>
+                  <a:pt x="5079888" y="1838093"/>
+                  <a:pt x="5083871" y="1837809"/>
+                </a:cubicBezTo>
+                <a:cubicBezTo>
+                  <a:pt x="5095927" y="1836951"/>
+                  <a:pt x="5275348" y="1705107"/>
+                  <a:pt x="5313249" y="1669256"/>
+                </a:cubicBezTo>
+                <a:cubicBezTo>
+                  <a:pt x="5329799" y="1653600"/>
+                  <a:pt x="5352395" y="1654087"/>
+                  <a:pt x="5358591" y="1670232"/>
+                </a:cubicBezTo>
+                <a:cubicBezTo>
+                  <a:pt x="5363415" y="1682804"/>
+                  <a:pt x="5329630" y="1745815"/>
+                  <a:pt x="5275287" y="1825594"/>
+                </a:cubicBezTo>
+                <a:cubicBezTo>
+                  <a:pt x="5260430" y="1847406"/>
+                  <a:pt x="5248275" y="1868177"/>
+                  <a:pt x="5248275" y="1871752"/>
+                </a:cubicBezTo>
+                <a:cubicBezTo>
+                  <a:pt x="5248275" y="1875328"/>
+                  <a:pt x="5232812" y="1911060"/>
+                  <a:pt x="5213913" y="1951158"/>
+                </a:cubicBezTo>
+                <a:cubicBezTo>
+                  <a:pt x="5195015" y="1991255"/>
+                  <a:pt x="5164845" y="2056209"/>
+                  <a:pt x="5146870" y="2095500"/>
+                </a:cubicBezTo>
+                <a:cubicBezTo>
+                  <a:pt x="5128895" y="2134790"/>
+                  <a:pt x="5107716" y="2179434"/>
+                  <a:pt x="5099806" y="2194709"/>
+                </a:cubicBezTo>
+                <a:cubicBezTo>
+                  <a:pt x="5079495" y="2233929"/>
+                  <a:pt x="5097170" y="2248465"/>
+                  <a:pt x="5182871" y="2263022"/>
+                </a:cubicBezTo>
+                <a:cubicBezTo>
+                  <a:pt x="5239221" y="2272594"/>
+                  <a:pt x="5256650" y="2272353"/>
+                  <a:pt x="5280804" y="2261669"/>
+                </a:cubicBezTo>
+                <a:cubicBezTo>
+                  <a:pt x="5296965" y="2254521"/>
+                  <a:pt x="5344477" y="2244092"/>
+                  <a:pt x="5386387" y="2238494"/>
+                </a:cubicBezTo>
+                <a:cubicBezTo>
+                  <a:pt x="5482413" y="2225667"/>
+                  <a:pt x="5488590" y="2224456"/>
+                  <a:pt x="5557837" y="2204868"/>
+                </a:cubicBezTo>
+                <a:cubicBezTo>
+                  <a:pt x="5645025" y="2180205"/>
+                  <a:pt x="5677011" y="2171624"/>
+                  <a:pt x="5734050" y="2157597"/>
+                </a:cubicBezTo>
+                <a:cubicBezTo>
+                  <a:pt x="5762863" y="2150511"/>
+                  <a:pt x="5831443" y="2128706"/>
+                  <a:pt x="5886450" y="2109142"/>
+                </a:cubicBezTo>
+                <a:cubicBezTo>
+                  <a:pt x="5956511" y="2084224"/>
+                  <a:pt x="6005003" y="2072971"/>
+                  <a:pt x="6048375" y="2071568"/>
+                </a:cubicBezTo>
+                <a:cubicBezTo>
+                  <a:pt x="6129878" y="2068931"/>
+                  <a:pt x="6262018" y="2019702"/>
+                  <a:pt x="6296710" y="1979050"/>
+                </a:cubicBezTo>
+                <a:cubicBezTo>
+                  <a:pt x="6318218" y="1953847"/>
+                  <a:pt x="6323542" y="1951803"/>
+                  <a:pt x="6340344" y="1962296"/>
+                </a:cubicBezTo>
+                <a:cubicBezTo>
+                  <a:pt x="6370636" y="1981213"/>
+                  <a:pt x="6547077" y="1910391"/>
+                  <a:pt x="6556157" y="1875670"/>
+                </a:cubicBezTo>
+                <a:cubicBezTo>
+                  <a:pt x="6561025" y="1857053"/>
+                  <a:pt x="6677551" y="1797169"/>
+                  <a:pt x="6732081" y="1785260"/>
+                </a:cubicBezTo>
+                <a:cubicBezTo>
+                  <a:pt x="6767146" y="1777603"/>
+                  <a:pt x="6860602" y="1742024"/>
+                  <a:pt x="6871811" y="1732064"/>
+                </a:cubicBezTo>
+                <a:cubicBezTo>
+                  <a:pt x="6906592" y="1701161"/>
+                  <a:pt x="7001771" y="1743903"/>
+                  <a:pt x="6981698" y="1781411"/>
+                </a:cubicBezTo>
+                <a:cubicBezTo>
+                  <a:pt x="6974700" y="1794487"/>
+                  <a:pt x="6975195" y="1805119"/>
+                  <a:pt x="6983415" y="1818282"/>
+                </a:cubicBezTo>
+                <a:cubicBezTo>
+                  <a:pt x="6998757" y="1842849"/>
+                  <a:pt x="6989613" y="1853167"/>
+                  <a:pt x="6887390" y="1926642"/>
+                </a:cubicBezTo>
+                <a:cubicBezTo>
+                  <a:pt x="6842412" y="1958971"/>
+                  <a:pt x="6782038" y="2004286"/>
+                  <a:pt x="6753225" y="2027342"/>
+                </a:cubicBezTo>
+                <a:cubicBezTo>
+                  <a:pt x="6724411" y="2050399"/>
+                  <a:pt x="6683934" y="2082667"/>
+                  <a:pt x="6663276" y="2099050"/>
+                </a:cubicBezTo>
+                <a:cubicBezTo>
+                  <a:pt x="6642617" y="2115433"/>
+                  <a:pt x="6599754" y="2150613"/>
+                  <a:pt x="6568026" y="2177228"/>
+                </a:cubicBezTo>
+                <a:cubicBezTo>
+                  <a:pt x="6536297" y="2203843"/>
+                  <a:pt x="6493192" y="2238165"/>
+                  <a:pt x="6472237" y="2253498"/>
+                </a:cubicBezTo>
+                <a:cubicBezTo>
+                  <a:pt x="6328537" y="2358647"/>
+                  <a:pt x="6076164" y="2570724"/>
+                  <a:pt x="5925966" y="2712546"/>
+                </a:cubicBezTo>
+                <a:cubicBezTo>
+                  <a:pt x="5847024" y="2787085"/>
+                  <a:pt x="5808320" y="2816955"/>
+                  <a:pt x="5782547" y="2823227"/>
+                </a:cubicBezTo>
+                <a:cubicBezTo>
+                  <a:pt x="5733000" y="2835284"/>
+                  <a:pt x="5665514" y="2938189"/>
+                  <a:pt x="5669495" y="2995612"/>
+                </a:cubicBezTo>
+                <a:cubicBezTo>
+                  <a:pt x="5671891" y="3030165"/>
+                  <a:pt x="5674797" y="3034012"/>
+                  <a:pt x="5700712" y="3036936"/>
+                </a:cubicBezTo>
+                <a:cubicBezTo>
+                  <a:pt x="5756658" y="3043248"/>
+                  <a:pt x="5770637" y="3080447"/>
+                  <a:pt x="5729287" y="3112973"/>
+                </a:cubicBezTo>
+                <a:cubicBezTo>
+                  <a:pt x="5716190" y="3123275"/>
+                  <a:pt x="5705475" y="3135620"/>
+                  <a:pt x="5705475" y="3140406"/>
+                </a:cubicBezTo>
+                <a:cubicBezTo>
+                  <a:pt x="5705475" y="3150539"/>
+                  <a:pt x="5787241" y="3209925"/>
+                  <a:pt x="5801192" y="3209925"/>
+                </a:cubicBezTo>
+                <a:cubicBezTo>
+                  <a:pt x="5806382" y="3209925"/>
+                  <a:pt x="5827603" y="3220640"/>
+                  <a:pt x="5848350" y="3233737"/>
+                </a:cubicBezTo>
+                <a:cubicBezTo>
+                  <a:pt x="5869096" y="3246834"/>
+                  <a:pt x="5898490" y="3257550"/>
+                  <a:pt x="5913669" y="3257550"/>
+                </a:cubicBezTo>
+                <a:cubicBezTo>
+                  <a:pt x="5928848" y="3257550"/>
+                  <a:pt x="5946603" y="3263979"/>
+                  <a:pt x="5953125" y="3271837"/>
+                </a:cubicBezTo>
+                <a:cubicBezTo>
+                  <a:pt x="5959646" y="3279695"/>
+                  <a:pt x="5974846" y="3286125"/>
+                  <a:pt x="5986902" y="3286125"/>
+                </a:cubicBezTo>
+                <a:cubicBezTo>
+                  <a:pt x="6014045" y="3286124"/>
+                  <a:pt x="6094658" y="3301917"/>
+                  <a:pt x="6157912" y="3319627"/>
+                </a:cubicBezTo>
+                <a:cubicBezTo>
+                  <a:pt x="6184106" y="3326961"/>
+                  <a:pt x="6218396" y="3335058"/>
+                  <a:pt x="6234112" y="3337621"/>
+                </a:cubicBezTo>
+                <a:cubicBezTo>
+                  <a:pt x="6249828" y="3340184"/>
+                  <a:pt x="6294834" y="3349128"/>
+                  <a:pt x="6334125" y="3357497"/>
+                </a:cubicBezTo>
+                <a:cubicBezTo>
+                  <a:pt x="6373415" y="3365866"/>
+                  <a:pt x="6422864" y="3375987"/>
+                  <a:pt x="6444010" y="3379988"/>
+                </a:cubicBezTo>
+                <a:cubicBezTo>
+                  <a:pt x="6465157" y="3383989"/>
+                  <a:pt x="6487485" y="3390369"/>
+                  <a:pt x="6493628" y="3394165"/>
+                </a:cubicBezTo>
+                <a:cubicBezTo>
+                  <a:pt x="6504150" y="3400668"/>
+                  <a:pt x="6566599" y="3411382"/>
+                  <a:pt x="6686550" y="3427262"/>
+                </a:cubicBezTo>
+                <a:cubicBezTo>
+                  <a:pt x="6715363" y="3431077"/>
+                  <a:pt x="6745366" y="3438316"/>
+                  <a:pt x="6753225" y="3443349"/>
+                </a:cubicBezTo>
+                <a:cubicBezTo>
+                  <a:pt x="6761083" y="3448382"/>
+                  <a:pt x="6794301" y="3455785"/>
+                  <a:pt x="6827043" y="3459800"/>
+                </a:cubicBezTo>
+                <a:cubicBezTo>
+                  <a:pt x="6933139" y="3472809"/>
+                  <a:pt x="7004026" y="3483827"/>
+                  <a:pt x="7086600" y="3500142"/>
+                </a:cubicBezTo>
+                <a:cubicBezTo>
+                  <a:pt x="7131129" y="3508940"/>
+                  <a:pt x="7197566" y="3519547"/>
+                  <a:pt x="7234237" y="3523712"/>
+                </a:cubicBezTo>
+                <a:cubicBezTo>
+                  <a:pt x="7320586" y="3533521"/>
+                  <a:pt x="7351038" y="3546142"/>
+                  <a:pt x="7354951" y="3573743"/>
+                </a:cubicBezTo>
+                <a:cubicBezTo>
+                  <a:pt x="7357834" y="3594079"/>
+                  <a:pt x="7363993" y="3596160"/>
+                  <a:pt x="7439025" y="3602143"/>
+                </a:cubicBezTo>
+                <a:cubicBezTo>
+                  <a:pt x="7506675" y="3607537"/>
+                  <a:pt x="7586424" y="3620495"/>
+                  <a:pt x="7635443" y="3634056"/>
+                </a:cubicBezTo>
+                <a:cubicBezTo>
+                  <a:pt x="7674721" y="3644923"/>
+                  <a:pt x="7649457" y="3724116"/>
+                  <a:pt x="7606617" y="3724413"/>
+                </a:cubicBezTo>
+                <a:cubicBezTo>
+                  <a:pt x="7595642" y="3724489"/>
+                  <a:pt x="7567374" y="3731341"/>
+                  <a:pt x="7543800" y="3739639"/>
+                </a:cubicBezTo>
+                <a:cubicBezTo>
+                  <a:pt x="7512381" y="3750697"/>
+                  <a:pt x="7486949" y="3752844"/>
+                  <a:pt x="7448550" y="3747676"/>
+                </a:cubicBezTo>
+                <a:cubicBezTo>
+                  <a:pt x="7359409" y="3735682"/>
+                  <a:pt x="7328656" y="3739357"/>
+                  <a:pt x="7293449" y="3766210"/>
+                </a:cubicBezTo>
+                <a:cubicBezTo>
+                  <a:pt x="7253665" y="3796555"/>
+                  <a:pt x="7219920" y="3803239"/>
+                  <a:pt x="6858000" y="3852463"/>
+                </a:cubicBezTo>
+                <a:cubicBezTo>
+                  <a:pt x="6802993" y="3859945"/>
+                  <a:pt x="6732270" y="3870551"/>
+                  <a:pt x="6700837" y="3876033"/>
+                </a:cubicBezTo>
+                <a:cubicBezTo>
+                  <a:pt x="6669405" y="3881515"/>
+                  <a:pt x="6585823" y="3894790"/>
+                  <a:pt x="6515100" y="3905532"/>
+                </a:cubicBezTo>
+                <a:cubicBezTo>
+                  <a:pt x="6444376" y="3916275"/>
+                  <a:pt x="6375796" y="3928917"/>
+                  <a:pt x="6362700" y="3933626"/>
+                </a:cubicBezTo>
+                <a:cubicBezTo>
+                  <a:pt x="6349603" y="3938335"/>
+                  <a:pt x="6319599" y="3944909"/>
+                  <a:pt x="6296025" y="3948236"/>
+                </a:cubicBezTo>
+                <a:cubicBezTo>
+                  <a:pt x="6217392" y="3959332"/>
+                  <a:pt x="5957858" y="4021799"/>
+                  <a:pt x="5872162" y="4050255"/>
+                </a:cubicBezTo>
+                <a:cubicBezTo>
+                  <a:pt x="5671136" y="4117006"/>
+                  <a:pt x="5516155" y="4189728"/>
+                  <a:pt x="5479718" y="4234400"/>
+                </a:cubicBezTo>
+                <a:cubicBezTo>
+                  <a:pt x="5393478" y="4340134"/>
+                  <a:pt x="5399272" y="4328482"/>
+                  <a:pt x="5410535" y="4373545"/>
+                </a:cubicBezTo>
+                <a:cubicBezTo>
+                  <a:pt x="5416212" y="4396256"/>
+                  <a:pt x="5422284" y="4423410"/>
+                  <a:pt x="5424029" y="4433887"/>
+                </a:cubicBezTo>
+                <a:cubicBezTo>
+                  <a:pt x="5428647" y="4461610"/>
+                  <a:pt x="5475319" y="4564018"/>
+                  <a:pt x="5491469" y="4581863"/>
+                </a:cubicBezTo>
+                <a:cubicBezTo>
+                  <a:pt x="5511216" y="4603684"/>
+                  <a:pt x="5543039" y="4703853"/>
+                  <a:pt x="5543315" y="4745061"/>
+                </a:cubicBezTo>
+                <a:cubicBezTo>
+                  <a:pt x="5543806" y="4818353"/>
+                  <a:pt x="5573732" y="4903476"/>
+                  <a:pt x="5706704" y="5209813"/>
+                </a:cubicBezTo>
+                <a:cubicBezTo>
+                  <a:pt x="5719125" y="5238428"/>
+                  <a:pt x="5777331" y="5358300"/>
+                  <a:pt x="5836052" y="5476195"/>
+                </a:cubicBezTo>
+                <a:cubicBezTo>
+                  <a:pt x="5931341" y="5667510"/>
+                  <a:pt x="5941315" y="5692212"/>
+                  <a:pt x="5928835" y="5706001"/>
+                </a:cubicBezTo>
+                <a:cubicBezTo>
+                  <a:pt x="5911681" y="5724956"/>
+                  <a:pt x="5941118" y="5775302"/>
+                  <a:pt x="5983800" y="5800011"/>
+                </a:cubicBezTo>
+                <a:cubicBezTo>
+                  <a:pt x="6024277" y="5823443"/>
+                  <a:pt x="6074508" y="5905500"/>
+                  <a:pt x="6048375" y="5905500"/>
+                </a:cubicBezTo>
+                <a:cubicBezTo>
+                  <a:pt x="6013559" y="5905500"/>
+                  <a:pt x="6128256" y="6124689"/>
+                  <a:pt x="6223958" y="6241044"/>
+                </a:cubicBezTo>
+                <a:cubicBezTo>
+                  <a:pt x="6342230" y="6384840"/>
+                  <a:pt x="6375827" y="6437356"/>
+                  <a:pt x="6365019" y="6461538"/>
+                </a:cubicBezTo>
+                <a:cubicBezTo>
+                  <a:pt x="6358036" y="6477158"/>
+                  <a:pt x="6361435" y="6490435"/>
+                  <a:pt x="6379949" y="6519862"/>
+                </a:cubicBezTo>
+                <a:cubicBezTo>
+                  <a:pt x="6405904" y="6561117"/>
+                  <a:pt x="6477893" y="6659767"/>
+                  <a:pt x="6487685" y="6667500"/>
+                </a:cubicBezTo>
+                <a:cubicBezTo>
+                  <a:pt x="6491002" y="6670119"/>
+                  <a:pt x="6496683" y="6690016"/>
+                  <a:pt x="6500309" y="6711715"/>
+                </a:cubicBezTo>
+                <a:cubicBezTo>
+                  <a:pt x="6506534" y="6748970"/>
+                  <a:pt x="6505267" y="6751983"/>
+                  <a:pt x="6477554" y="6765808"/>
+                </a:cubicBezTo>
+                <a:cubicBezTo>
+                  <a:pt x="6448289" y="6780407"/>
+                  <a:pt x="6448094" y="6780328"/>
+                  <a:pt x="6407834" y="6737458"/>
+                </a:cubicBezTo>
+                <a:cubicBezTo>
+                  <a:pt x="6385630" y="6713814"/>
+                  <a:pt x="6363176" y="6686974"/>
+                  <a:pt x="6357937" y="6677814"/>
+                </a:cubicBezTo>
+                <a:cubicBezTo>
+                  <a:pt x="6340081" y="6646592"/>
+                  <a:pt x="6272794" y="6567623"/>
+                  <a:pt x="6194946" y="6486525"/>
+                </a:cubicBezTo>
+                <a:cubicBezTo>
+                  <a:pt x="6152202" y="6441995"/>
+                  <a:pt x="6106295" y="6392703"/>
+                  <a:pt x="6092931" y="6376987"/>
+                </a:cubicBezTo>
+                <a:cubicBezTo>
+                  <a:pt x="6069711" y="6349679"/>
+                  <a:pt x="6068046" y="6349203"/>
+                  <a:pt x="6055397" y="6366248"/>
+                </a:cubicBezTo>
+                <a:cubicBezTo>
+                  <a:pt x="6046785" y="6377852"/>
+                  <a:pt x="6035758" y="6382028"/>
+                  <a:pt x="6023836" y="6378201"/>
+                </a:cubicBezTo>
+                <a:cubicBezTo>
+                  <a:pt x="6002643" y="6371396"/>
+                  <a:pt x="5235292" y="5594520"/>
+                  <a:pt x="5202758" y="5546929"/>
+                </a:cubicBezTo>
+                <a:cubicBezTo>
+                  <a:pt x="5190820" y="5529468"/>
+                  <a:pt x="5169379" y="5509144"/>
+                  <a:pt x="5155110" y="5501766"/>
+                </a:cubicBezTo>
+                <a:cubicBezTo>
+                  <a:pt x="5111088" y="5479001"/>
+                  <a:pt x="5088202" y="5448588"/>
+                  <a:pt x="5107124" y="5437999"/>
+                </a:cubicBezTo>
+                <a:cubicBezTo>
+                  <a:pt x="5120974" y="5430248"/>
+                  <a:pt x="5119904" y="5426028"/>
+                  <a:pt x="5097661" y="5400680"/>
+                </a:cubicBezTo>
+                <a:cubicBezTo>
+                  <a:pt x="5067973" y="5366847"/>
+                  <a:pt x="5061180" y="5365783"/>
+                  <a:pt x="5040209" y="5391682"/>
+                </a:cubicBezTo>
+                <a:cubicBezTo>
+                  <a:pt x="5024424" y="5411175"/>
+                  <a:pt x="5024102" y="5411089"/>
+                  <a:pt x="4969203" y="5372632"/>
+                </a:cubicBezTo>
+                <a:cubicBezTo>
+                  <a:pt x="4938871" y="5351384"/>
+                  <a:pt x="4911895" y="5334000"/>
+                  <a:pt x="4909256" y="5334000"/>
+                </a:cubicBezTo>
+                <a:cubicBezTo>
+                  <a:pt x="4906618" y="5334000"/>
+                  <a:pt x="4880019" y="5318082"/>
+                  <a:pt x="4850148" y="5298626"/>
+                </a:cubicBezTo>
+                <a:cubicBezTo>
+                  <a:pt x="4767233" y="5244623"/>
+                  <a:pt x="4753783" y="5238750"/>
+                  <a:pt x="4713029" y="5238750"/>
+                </a:cubicBezTo>
+                <a:cubicBezTo>
+                  <a:pt x="4676295" y="5238750"/>
+                  <a:pt x="4675427" y="5239507"/>
+                  <a:pt x="4681338" y="5266418"/>
+                </a:cubicBezTo>
+                <a:cubicBezTo>
+                  <a:pt x="4690349" y="5307445"/>
+                  <a:pt x="4674357" y="5309790"/>
+                  <a:pt x="4606476" y="5277393"/>
+                </a:cubicBezTo>
+                <a:cubicBezTo>
+                  <a:pt x="4501881" y="5227475"/>
+                  <a:pt x="4428648" y="5259456"/>
+                  <a:pt x="4322864" y="5401246"/>
+                </a:cubicBezTo>
+                <a:cubicBezTo>
+                  <a:pt x="4273344" y="5467622"/>
+                  <a:pt x="4179965" y="5704961"/>
+                  <a:pt x="4158199" y="5819775"/>
+                </a:cubicBezTo>
+                <a:cubicBezTo>
+                  <a:pt x="4154723" y="5838110"/>
+                  <a:pt x="4146158" y="5868114"/>
+                  <a:pt x="4139166" y="5886450"/>
+                </a:cubicBezTo>
+                <a:cubicBezTo>
+                  <a:pt x="4122150" y="5931073"/>
+                  <a:pt x="4095750" y="6082453"/>
+                  <a:pt x="4095750" y="6135397"/>
+                </a:cubicBezTo>
+                <a:cubicBezTo>
+                  <a:pt x="4095750" y="6158782"/>
+                  <a:pt x="4091000" y="6182664"/>
+                  <a:pt x="4085195" y="6188469"/>
+                </a:cubicBezTo>
+                <a:cubicBezTo>
+                  <a:pt x="4079132" y="6194532"/>
+                  <a:pt x="4072592" y="6251086"/>
+                  <a:pt x="4069828" y="6321343"/>
+                </a:cubicBezTo>
+                <a:cubicBezTo>
+                  <a:pt x="4067182" y="6388619"/>
+                  <a:pt x="4061615" y="6450137"/>
+                  <a:pt x="4057456" y="6458051"/>
+                </a:cubicBezTo>
+                <a:cubicBezTo>
+                  <a:pt x="4053297" y="6465965"/>
+                  <a:pt x="4049353" y="6534022"/>
+                  <a:pt x="4048692" y="6609290"/>
+                </a:cubicBezTo>
+                <a:cubicBezTo>
+                  <a:pt x="4048030" y="6684557"/>
+                  <a:pt x="4044129" y="6753092"/>
+                  <a:pt x="4040023" y="6761588"/>
+                </a:cubicBezTo>
+                <a:cubicBezTo>
+                  <a:pt x="4032038" y="6778111"/>
+                  <a:pt x="4033393" y="6876068"/>
+                  <a:pt x="4043531" y="7015162"/>
+                </a:cubicBezTo>
+                <a:cubicBezTo>
+                  <a:pt x="4049437" y="7096187"/>
+                  <a:pt x="4048543" y="7102323"/>
+                  <a:pt x="4027218" y="7127081"/>
+                </a:cubicBezTo>
+                <a:cubicBezTo>
+                  <a:pt x="3996946" y="7162225"/>
+                  <a:pt x="3989116" y="7160267"/>
+                  <a:pt x="3969543" y="7112657"/>
+                </a:cubicBezTo>
+                <a:close/>
+                <a:moveTo>
+                  <a:pt x="3860106" y="6000149"/>
+                </a:moveTo>
+                <a:cubicBezTo>
+                  <a:pt x="3857226" y="5968387"/>
+                  <a:pt x="3859579" y="5920167"/>
+                  <a:pt x="3865334" y="5892993"/>
+                </a:cubicBezTo>
+                <a:cubicBezTo>
+                  <a:pt x="3871089" y="5865820"/>
+                  <a:pt x="3880524" y="5805011"/>
+                  <a:pt x="3886301" y="5757862"/>
+                </a:cubicBezTo>
+                <a:cubicBezTo>
+                  <a:pt x="3897074" y="5669934"/>
+                  <a:pt x="3934585" y="5513995"/>
+                  <a:pt x="3957286" y="5462770"/>
+                </a:cubicBezTo>
+                <a:cubicBezTo>
+                  <a:pt x="3964296" y="5446953"/>
+                  <a:pt x="3972238" y="5425440"/>
+                  <a:pt x="3974937" y="5414962"/>
+                </a:cubicBezTo>
+                <a:cubicBezTo>
+                  <a:pt x="4020994" y="5236117"/>
+                  <a:pt x="4193842" y="5012530"/>
+                  <a:pt x="4319492" y="4969264"/>
+                </a:cubicBezTo>
+                <a:cubicBezTo>
+                  <a:pt x="4340499" y="4962031"/>
+                  <a:pt x="4372689" y="4950749"/>
+                  <a:pt x="4391025" y="4944194"/>
+                </a:cubicBezTo>
+                <a:cubicBezTo>
+                  <a:pt x="4489325" y="4909053"/>
+                  <a:pt x="4579501" y="4898913"/>
+                  <a:pt x="4617764" y="4918700"/>
+                </a:cubicBezTo>
+                <a:cubicBezTo>
+                  <a:pt x="4632787" y="4926469"/>
+                  <a:pt x="4683285" y="4937798"/>
+                  <a:pt x="4729983" y="4943875"/>
+                </a:cubicBezTo>
+                <a:cubicBezTo>
+                  <a:pt x="4776680" y="4949953"/>
+                  <a:pt x="4818959" y="4958779"/>
+                  <a:pt x="4823936" y="4963488"/>
+                </a:cubicBezTo>
+                <a:cubicBezTo>
+                  <a:pt x="4828913" y="4968197"/>
+                  <a:pt x="4842590" y="4972050"/>
+                  <a:pt x="4854330" y="4972050"/>
+                </a:cubicBezTo>
+                <a:cubicBezTo>
+                  <a:pt x="4866070" y="4972050"/>
+                  <a:pt x="4878006" y="4975821"/>
+                  <a:pt x="4880855" y="4980431"/>
+                </a:cubicBezTo>
+                <a:cubicBezTo>
+                  <a:pt x="4883704" y="4985041"/>
+                  <a:pt x="4907513" y="4995837"/>
+                  <a:pt x="4933763" y="5004423"/>
+                </a:cubicBezTo>
+                <a:cubicBezTo>
+                  <a:pt x="5065038" y="5047361"/>
+                  <a:pt x="5272646" y="5213415"/>
+                  <a:pt x="5505120" y="5461419"/>
+                </a:cubicBezTo>
+                <a:cubicBezTo>
+                  <a:pt x="5565739" y="5526088"/>
+                  <a:pt x="5577399" y="5519575"/>
+                  <a:pt x="5531192" y="5446856"/>
+                </a:cubicBezTo>
+                <a:cubicBezTo>
+                  <a:pt x="5513388" y="5418837"/>
+                  <a:pt x="5480546" y="5357336"/>
+                  <a:pt x="5458210" y="5310187"/>
+                </a:cubicBezTo>
+                <a:cubicBezTo>
+                  <a:pt x="5435873" y="5263038"/>
+                  <a:pt x="5413061" y="5215890"/>
+                  <a:pt x="5407516" y="5205412"/>
+                </a:cubicBezTo>
+                <a:cubicBezTo>
+                  <a:pt x="5401971" y="5194935"/>
+                  <a:pt x="5385133" y="5160645"/>
+                  <a:pt x="5370097" y="5129212"/>
+                </a:cubicBezTo>
+                <a:cubicBezTo>
+                  <a:pt x="5355061" y="5097780"/>
+                  <a:pt x="5338645" y="5064619"/>
+                  <a:pt x="5333617" y="5055522"/>
+                </a:cubicBezTo>
+                <a:cubicBezTo>
+                  <a:pt x="5328589" y="5046426"/>
+                  <a:pt x="5324475" y="5033849"/>
+                  <a:pt x="5324475" y="5027574"/>
+                </a:cubicBezTo>
+                <a:cubicBezTo>
+                  <a:pt x="5324475" y="5021298"/>
+                  <a:pt x="5315390" y="4997399"/>
+                  <a:pt x="5304288" y="4974463"/>
+                </a:cubicBezTo>
+                <a:cubicBezTo>
+                  <a:pt x="5285174" y="4934981"/>
+                  <a:pt x="5278740" y="4914525"/>
+                  <a:pt x="5257088" y="4824412"/>
+                </a:cubicBezTo>
+                <a:cubicBezTo>
+                  <a:pt x="5252053" y="4803457"/>
+                  <a:pt x="5244066" y="4777740"/>
+                  <a:pt x="5239339" y="4767262"/>
+                </a:cubicBezTo>
+                <a:cubicBezTo>
+                  <a:pt x="5225135" y="4735781"/>
+                  <a:pt x="5217067" y="4675630"/>
+                  <a:pt x="5218385" y="4611033"/>
+                </a:cubicBezTo>
+                <a:cubicBezTo>
+                  <a:pt x="5219069" y="4577494"/>
+                  <a:pt x="5215185" y="4544700"/>
+                  <a:pt x="5209755" y="4538156"/>
+                </a:cubicBezTo>
+                <a:cubicBezTo>
+                  <a:pt x="5204075" y="4531312"/>
+                  <a:pt x="5201055" y="4490454"/>
+                  <a:pt x="5202646" y="4441973"/>
+                </a:cubicBezTo>
+                <a:cubicBezTo>
+                  <a:pt x="5205173" y="4364966"/>
+                  <a:pt x="5207120" y="4357443"/>
+                  <a:pt x="5225189" y="4354860"/>
+                </a:cubicBezTo>
+                <a:cubicBezTo>
+                  <a:pt x="5238029" y="4353025"/>
+                  <a:pt x="5248890" y="4359706"/>
+                  <a:pt x="5256154" y="4373910"/>
+                </a:cubicBezTo>
+                <a:cubicBezTo>
+                  <a:pt x="5265522" y="4392227"/>
+                  <a:pt x="5266404" y="4387263"/>
+                  <a:pt x="5261576" y="4343400"/>
+                </a:cubicBezTo>
+                <a:cubicBezTo>
+                  <a:pt x="5257978" y="4310711"/>
+                  <a:pt x="5248672" y="4283247"/>
+                  <a:pt x="5236827" y="4270360"/>
+                </a:cubicBezTo>
+                <a:cubicBezTo>
+                  <a:pt x="5212068" y="4243425"/>
+                  <a:pt x="5218594" y="4211497"/>
+                  <a:pt x="5270571" y="4105275"/>
+                </a:cubicBezTo>
+                <a:cubicBezTo>
+                  <a:pt x="5333347" y="3976982"/>
+                  <a:pt x="5494528" y="3825430"/>
+                  <a:pt x="5634037" y="3763524"/>
+                </a:cubicBezTo>
+                <a:cubicBezTo>
+                  <a:pt x="5705611" y="3731763"/>
+                  <a:pt x="5722711" y="3724871"/>
+                  <a:pt x="5767387" y="3709776"/>
+                </a:cubicBezTo>
+                <a:cubicBezTo>
+                  <a:pt x="5793581" y="3700926"/>
+                  <a:pt x="5823585" y="3690174"/>
+                  <a:pt x="5834062" y="3685884"/>
+                </a:cubicBezTo>
+                <a:cubicBezTo>
+                  <a:pt x="5844540" y="3681594"/>
+                  <a:pt x="5863828" y="3676053"/>
+                  <a:pt x="5876925" y="3673570"/>
+                </a:cubicBezTo>
+                <a:cubicBezTo>
+                  <a:pt x="5890021" y="3671087"/>
+                  <a:pt x="5913596" y="3664598"/>
+                  <a:pt x="5929312" y="3659151"/>
+                </a:cubicBezTo>
+                <a:cubicBezTo>
+                  <a:pt x="5992185" y="3637361"/>
+                  <a:pt x="6122896" y="3609974"/>
+                  <a:pt x="6164027" y="3609975"/>
+                </a:cubicBezTo>
+                <a:cubicBezTo>
+                  <a:pt x="6179688" y="3609975"/>
+                  <a:pt x="6201769" y="3605015"/>
+                  <a:pt x="6213094" y="3598954"/>
+                </a:cubicBezTo>
+                <a:cubicBezTo>
+                  <a:pt x="6233220" y="3588183"/>
+                  <a:pt x="6233260" y="3587766"/>
+                  <a:pt x="6214850" y="3580573"/>
+                </a:cubicBezTo>
+                <a:cubicBezTo>
+                  <a:pt x="6204489" y="3576525"/>
+                  <a:pt x="6177028" y="3572912"/>
+                  <a:pt x="6153826" y="3572544"/>
+                </a:cubicBezTo>
+                <a:cubicBezTo>
+                  <a:pt x="6112392" y="3571886"/>
+                  <a:pt x="6060883" y="3559347"/>
+                  <a:pt x="6025908" y="3541403"/>
+                </a:cubicBezTo>
+                <a:cubicBezTo>
+                  <a:pt x="6016171" y="3536408"/>
+                  <a:pt x="5984025" y="3524408"/>
+                  <a:pt x="5954471" y="3514738"/>
+                </a:cubicBezTo>
+                <a:cubicBezTo>
+                  <a:pt x="5745672" y="3446417"/>
+                  <a:pt x="5572125" y="3329137"/>
+                  <a:pt x="5572125" y="3256357"/>
+                </a:cubicBezTo>
+                <a:cubicBezTo>
+                  <a:pt x="5572125" y="3250955"/>
+                  <a:pt x="5554980" y="3230547"/>
+                  <a:pt x="5534025" y="3211007"/>
+                </a:cubicBezTo>
+                <a:cubicBezTo>
+                  <a:pt x="5511969" y="3190441"/>
+                  <a:pt x="5495925" y="3166688"/>
+                  <a:pt x="5495925" y="3154602"/>
+                </a:cubicBezTo>
+                <a:cubicBezTo>
+                  <a:pt x="5495925" y="3139086"/>
+                  <a:pt x="5490222" y="3133725"/>
+                  <a:pt x="5473722" y="3133725"/>
+                </a:cubicBezTo>
+                <a:cubicBezTo>
+                  <a:pt x="5434745" y="3133725"/>
+                  <a:pt x="5409345" y="3048075"/>
+                  <a:pt x="5434115" y="3000174"/>
+                </a:cubicBezTo>
+                <a:cubicBezTo>
+                  <a:pt x="5441917" y="2985088"/>
+                  <a:pt x="5448300" y="2962070"/>
+                  <a:pt x="5448300" y="2949022"/>
+                </a:cubicBezTo>
+                <a:cubicBezTo>
+                  <a:pt x="5448300" y="2935974"/>
+                  <a:pt x="5452586" y="2922650"/>
+                  <a:pt x="5457825" y="2919412"/>
+                </a:cubicBezTo>
+                <a:cubicBezTo>
+                  <a:pt x="5463063" y="2916174"/>
+                  <a:pt x="5467350" y="2905157"/>
+                  <a:pt x="5467350" y="2894930"/>
+                </a:cubicBezTo>
+                <a:cubicBezTo>
+                  <a:pt x="5467350" y="2884702"/>
+                  <a:pt x="5484495" y="2851217"/>
+                  <a:pt x="5505450" y="2820518"/>
+                </a:cubicBezTo>
+                <a:cubicBezTo>
+                  <a:pt x="5526405" y="2789818"/>
+                  <a:pt x="5543550" y="2761797"/>
+                  <a:pt x="5543550" y="2758247"/>
+                </a:cubicBezTo>
+                <a:cubicBezTo>
+                  <a:pt x="5543550" y="2749833"/>
+                  <a:pt x="5617679" y="2642664"/>
+                  <a:pt x="5648325" y="2606773"/>
+                </a:cubicBezTo>
+                <a:cubicBezTo>
+                  <a:pt x="5680797" y="2568743"/>
+                  <a:pt x="5791801" y="2472809"/>
+                  <a:pt x="5895150" y="2393459"/>
+                </a:cubicBezTo>
+                <a:cubicBezTo>
+                  <a:pt x="5922791" y="2372236"/>
+                  <a:pt x="5884963" y="2379092"/>
+                  <a:pt x="5831129" y="2405062"/>
+                </a:cubicBezTo>
+                <a:cubicBezTo>
+                  <a:pt x="5803980" y="2418159"/>
+                  <a:pt x="5776952" y="2428874"/>
+                  <a:pt x="5771065" y="2428875"/>
+                </a:cubicBezTo>
+                <a:cubicBezTo>
+                  <a:pt x="5765179" y="2428875"/>
+                  <a:pt x="5734083" y="2437245"/>
+                  <a:pt x="5701962" y="2447476"/>
+                </a:cubicBezTo>
+                <a:cubicBezTo>
+                  <a:pt x="5578626" y="2486761"/>
+                  <a:pt x="5543619" y="2495550"/>
+                  <a:pt x="5510468" y="2495550"/>
+                </a:cubicBezTo>
+                <a:cubicBezTo>
+                  <a:pt x="5491623" y="2495550"/>
+                  <a:pt x="5466711" y="2501517"/>
+                  <a:pt x="5455108" y="2508810"/>
+                </a:cubicBezTo>
+                <a:cubicBezTo>
+                  <a:pt x="5442826" y="2516530"/>
+                  <a:pt x="5380287" y="2526702"/>
+                  <a:pt x="5305425" y="2533157"/>
+                </a:cubicBezTo>
+                <a:cubicBezTo>
+                  <a:pt x="5234701" y="2539254"/>
+                  <a:pt x="5163978" y="2545728"/>
+                  <a:pt x="5148262" y="2547543"/>
+                </a:cubicBezTo>
+                <a:cubicBezTo>
+                  <a:pt x="5117215" y="2551128"/>
+                  <a:pt x="4921674" y="2527751"/>
+                  <a:pt x="4866485" y="2513856"/>
+                </a:cubicBezTo>
+                <a:cubicBezTo>
+                  <a:pt x="4783144" y="2492873"/>
+                  <a:pt x="4747002" y="2402424"/>
+                  <a:pt x="4785317" y="2310724"/>
+                </a:cubicBezTo>
+                <a:cubicBezTo>
+                  <a:pt x="4793722" y="2290607"/>
+                  <a:pt x="4800600" y="2272936"/>
+                  <a:pt x="4800600" y="2271455"/>
+                </a:cubicBezTo>
+                <a:cubicBezTo>
+                  <a:pt x="4800600" y="2269974"/>
+                  <a:pt x="4783682" y="2271031"/>
+                  <a:pt x="4763005" y="2273805"/>
+                </a:cubicBezTo>
+                <a:cubicBezTo>
+                  <a:pt x="4735856" y="2277446"/>
+                  <a:pt x="4721112" y="2274548"/>
+                  <a:pt x="4709938" y="2263373"/>
+                </a:cubicBezTo>
+                <a:cubicBezTo>
+                  <a:pt x="4701427" y="2254863"/>
+                  <a:pt x="4689296" y="2247899"/>
+                  <a:pt x="4682979" y="2247899"/>
+                </a:cubicBezTo>
+                <a:cubicBezTo>
+                  <a:pt x="4652434" y="2247899"/>
+                  <a:pt x="4543425" y="2107813"/>
+                  <a:pt x="4543425" y="2068560"/>
+                </a:cubicBezTo>
+                <a:cubicBezTo>
+                  <a:pt x="4543425" y="2059186"/>
+                  <a:pt x="4537131" y="2043195"/>
+                  <a:pt x="4529440" y="2033026"/>
+                </a:cubicBezTo>
+                <a:cubicBezTo>
+                  <a:pt x="4521748" y="2022857"/>
+                  <a:pt x="4515319" y="2003275"/>
+                  <a:pt x="4515152" y="1989510"/>
+                </a:cubicBezTo>
+                <a:cubicBezTo>
+                  <a:pt x="4514986" y="1975744"/>
+                  <a:pt x="4508838" y="1959493"/>
+                  <a:pt x="4501490" y="1953394"/>
+                </a:cubicBezTo>
+                <a:cubicBezTo>
+                  <a:pt x="4494142" y="1947296"/>
+                  <a:pt x="4485705" y="1924268"/>
+                  <a:pt x="4482742" y="1902222"/>
+                </a:cubicBezTo>
+                <a:cubicBezTo>
+                  <a:pt x="4469226" y="1801654"/>
+                  <a:pt x="4464433" y="1781191"/>
+                  <a:pt x="4451971" y="1770848"/>
+                </a:cubicBezTo>
+                <a:cubicBezTo>
+                  <a:pt x="4436391" y="1757917"/>
+                  <a:pt x="4435196" y="1679820"/>
+                  <a:pt x="4449360" y="1600200"/>
+                </a:cubicBezTo>
+                <a:cubicBezTo>
+                  <a:pt x="4454486" y="1571386"/>
+                  <a:pt x="4462305" y="1522095"/>
+                  <a:pt x="4466735" y="1490662"/>
+                </a:cubicBezTo>
+                <a:cubicBezTo>
+                  <a:pt x="4477798" y="1412178"/>
+                  <a:pt x="4492847" y="1358296"/>
+                  <a:pt x="4504821" y="1354305"/>
+                </a:cubicBezTo>
+                <a:cubicBezTo>
+                  <a:pt x="4520354" y="1349127"/>
+                  <a:pt x="4516649" y="1314450"/>
+                  <a:pt x="4500562" y="1314450"/>
+                </a:cubicBezTo>
+                <a:cubicBezTo>
+                  <a:pt x="4492704" y="1314450"/>
+                  <a:pt x="4486275" y="1322665"/>
+                  <a:pt x="4486275" y="1332706"/>
+                </a:cubicBezTo>
+                <a:cubicBezTo>
+                  <a:pt x="4486275" y="1342747"/>
+                  <a:pt x="4483060" y="1352391"/>
+                  <a:pt x="4479131" y="1354137"/>
+                </a:cubicBezTo>
+                <a:cubicBezTo>
+                  <a:pt x="4475202" y="1355883"/>
+                  <a:pt x="4456486" y="1380886"/>
+                  <a:pt x="4437541" y="1409700"/>
+                </a:cubicBezTo>
+                <a:cubicBezTo>
+                  <a:pt x="4381600" y="1494779"/>
+                  <a:pt x="4257743" y="1636084"/>
+                  <a:pt x="4225575" y="1651526"/>
+                </a:cubicBezTo>
+                <a:cubicBezTo>
+                  <a:pt x="4209178" y="1659397"/>
+                  <a:pt x="4152900" y="1709319"/>
+                  <a:pt x="4100512" y="1762462"/>
+                </a:cubicBezTo>
+                <a:cubicBezTo>
+                  <a:pt x="3991145" y="1873407"/>
+                  <a:pt x="3979839" y="1881330"/>
+                  <a:pt x="3952082" y="1866475"/>
+                </a:cubicBezTo>
+                <a:cubicBezTo>
+                  <a:pt x="3936471" y="1858121"/>
+                  <a:pt x="3928694" y="1859065"/>
+                  <a:pt x="3915613" y="1870903"/>
+                </a:cubicBezTo>
+                <a:cubicBezTo>
+                  <a:pt x="3906469" y="1879178"/>
+                  <a:pt x="3895996" y="1885950"/>
+                  <a:pt x="3892339" y="1885950"/>
+                </a:cubicBezTo>
+                <a:cubicBezTo>
+                  <a:pt x="3888683" y="1885950"/>
+                  <a:pt x="3870406" y="1899880"/>
+                  <a:pt x="3851722" y="1916906"/>
+                </a:cubicBezTo>
+                <a:cubicBezTo>
+                  <a:pt x="3739617" y="2019067"/>
+                  <a:pt x="3547980" y="2036825"/>
+                  <a:pt x="3392022" y="1959504"/>
+                </a:cubicBezTo>
+                <a:cubicBezTo>
+                  <a:pt x="3303423" y="1915578"/>
+                  <a:pt x="3059054" y="1625252"/>
+                  <a:pt x="3057525" y="1562100"/>
+                </a:cubicBezTo>
+                <a:cubicBezTo>
+                  <a:pt x="3057335" y="1554241"/>
+                  <a:pt x="3044398" y="1524624"/>
+                  <a:pt x="3028777" y="1496284"/>
+                </a:cubicBezTo>
+                <a:cubicBezTo>
+                  <a:pt x="3013156" y="1467944"/>
+                  <a:pt x="3000348" y="1440083"/>
+                  <a:pt x="3000316" y="1434371"/>
+                </a:cubicBezTo>
+                <a:cubicBezTo>
+                  <a:pt x="3000284" y="1428660"/>
+                  <a:pt x="2994411" y="1412784"/>
+                  <a:pt x="2987267" y="1399091"/>
+                </a:cubicBezTo>
+                <a:cubicBezTo>
+                  <a:pt x="2980122" y="1385398"/>
+                  <a:pt x="2964497" y="1337178"/>
+                  <a:pt x="2952545" y="1291935"/>
+                </a:cubicBezTo>
+                <a:cubicBezTo>
+                  <a:pt x="2928239" y="1199927"/>
+                  <a:pt x="2919087" y="1190858"/>
+                  <a:pt x="2910380" y="1250156"/>
+                </a:cubicBezTo>
+                <a:cubicBezTo>
+                  <a:pt x="2895429" y="1351975"/>
+                  <a:pt x="2883417" y="1416207"/>
+                  <a:pt x="2875561" y="1436341"/>
+                </a:cubicBezTo>
+                <a:cubicBezTo>
+                  <a:pt x="2870866" y="1448375"/>
+                  <a:pt x="2867025" y="1470388"/>
+                  <a:pt x="2867025" y="1485259"/>
+                </a:cubicBezTo>
+                <a:cubicBezTo>
+                  <a:pt x="2867025" y="1500130"/>
+                  <a:pt x="2860622" y="1524574"/>
+                  <a:pt x="2852796" y="1539579"/>
+                </a:cubicBezTo>
+                <a:cubicBezTo>
+                  <a:pt x="2844970" y="1554585"/>
+                  <a:pt x="2838486" y="1573291"/>
+                  <a:pt x="2838388" y="1581150"/>
+                </a:cubicBezTo>
+                <a:cubicBezTo>
+                  <a:pt x="2838184" y="1597390"/>
+                  <a:pt x="2791908" y="1691463"/>
+                  <a:pt x="2764659" y="1731031"/>
+                </a:cubicBezTo>
+                <a:cubicBezTo>
+                  <a:pt x="2754685" y="1745513"/>
+                  <a:pt x="2740915" y="1771428"/>
+                  <a:pt x="2734057" y="1788621"/>
+                </a:cubicBezTo>
+                <a:cubicBezTo>
+                  <a:pt x="2709541" y="1850081"/>
+                  <a:pt x="2584564" y="1962585"/>
+                  <a:pt x="2485737" y="2012157"/>
+                </a:cubicBezTo>
+                <a:cubicBezTo>
+                  <a:pt x="2436127" y="2037042"/>
+                  <a:pt x="2388289" y="2057402"/>
+                  <a:pt x="2379430" y="2057401"/>
+                </a:cubicBezTo>
+                <a:cubicBezTo>
+                  <a:pt x="2370572" y="2057400"/>
+                  <a:pt x="2361017" y="2061132"/>
+                  <a:pt x="2358198" y="2065694"/>
+                </a:cubicBezTo>
+                <a:cubicBezTo>
+                  <a:pt x="2352012" y="2075702"/>
+                  <a:pt x="2283612" y="2085038"/>
+                  <a:pt x="2163615" y="2092253"/>
+                </a:cubicBezTo>
+                <a:cubicBezTo>
+                  <a:pt x="2037774" y="2099818"/>
+                  <a:pt x="1772297" y="2045043"/>
+                  <a:pt x="1664378" y="1989246"/>
+                </a:cubicBezTo>
+                <a:cubicBezTo>
+                  <a:pt x="1619587" y="1966088"/>
+                  <a:pt x="1609541" y="1962150"/>
+                  <a:pt x="1595267" y="1962150"/>
+                </a:cubicBezTo>
+                <a:cubicBezTo>
+                  <a:pt x="1587174" y="1962150"/>
+                  <a:pt x="1578084" y="1955720"/>
+                  <a:pt x="1575069" y="1947862"/>
+                </a:cubicBezTo>
+                <a:cubicBezTo>
+                  <a:pt x="1570275" y="1935368"/>
+                  <a:pt x="1533525" y="1926520"/>
+                  <a:pt x="1533525" y="1937859"/>
+                </a:cubicBezTo>
+                <a:cubicBezTo>
+                  <a:pt x="1533525" y="1940216"/>
+                  <a:pt x="1546134" y="1960829"/>
+                  <a:pt x="1561547" y="1983666"/>
+                </a:cubicBezTo>
+                <a:cubicBezTo>
+                  <a:pt x="1590948" y="2027230"/>
+                  <a:pt x="1649492" y="2140088"/>
+                  <a:pt x="1688734" y="2228850"/>
+                </a:cubicBezTo>
+                <a:cubicBezTo>
+                  <a:pt x="1701472" y="2257663"/>
+                  <a:pt x="1720761" y="2300929"/>
+                  <a:pt x="1731599" y="2324998"/>
+                </a:cubicBezTo>
+                <a:cubicBezTo>
+                  <a:pt x="1751977" y="2370256"/>
+                  <a:pt x="1781174" y="2505176"/>
+                  <a:pt x="1781174" y="2554087"/>
+                </a:cubicBezTo>
+                <a:cubicBezTo>
+                  <a:pt x="1781174" y="2569409"/>
+                  <a:pt x="1787926" y="2592249"/>
+                  <a:pt x="1796178" y="2604843"/>
+                </a:cubicBezTo>
+                <a:cubicBezTo>
+                  <a:pt x="1819477" y="2640401"/>
+                  <a:pt x="1799727" y="2880777"/>
+                  <a:pt x="1771154" y="2909411"/>
+                </a:cubicBezTo>
+                <a:cubicBezTo>
+                  <a:pt x="1766188" y="2914388"/>
+                  <a:pt x="1762125" y="2926406"/>
+                  <a:pt x="1762125" y="2936119"/>
+                </a:cubicBezTo>
+                <a:cubicBezTo>
+                  <a:pt x="1762125" y="2999237"/>
+                  <a:pt x="1555561" y="3285002"/>
+                  <a:pt x="1451863" y="3365343"/>
+                </a:cubicBezTo>
+                <a:cubicBezTo>
+                  <a:pt x="1349938" y="3444310"/>
+                  <a:pt x="1266699" y="3505199"/>
+                  <a:pt x="1260672" y="3505200"/>
+                </a:cubicBezTo>
+                <a:cubicBezTo>
+                  <a:pt x="1257187" y="3505200"/>
+                  <a:pt x="1240286" y="3515915"/>
+                  <a:pt x="1223115" y="3529012"/>
+                </a:cubicBezTo>
+                <a:cubicBezTo>
+                  <a:pt x="1205944" y="3542109"/>
+                  <a:pt x="1187681" y="3552825"/>
+                  <a:pt x="1182529" y="3552825"/>
+                </a:cubicBezTo>
+                <a:cubicBezTo>
+                  <a:pt x="1177377" y="3552825"/>
+                  <a:pt x="1171733" y="3556039"/>
+                  <a:pt x="1169987" y="3559968"/>
+                </a:cubicBezTo>
+                <a:cubicBezTo>
+                  <a:pt x="1163415" y="3574755"/>
+                  <a:pt x="1088588" y="3608108"/>
+                  <a:pt x="1035408" y="3619954"/>
+                </a:cubicBezTo>
+                <a:cubicBezTo>
+                  <a:pt x="947043" y="3639637"/>
+                  <a:pt x="954755" y="3650820"/>
+                  <a:pt x="1064418" y="3662018"/>
+                </a:cubicBezTo>
+                <a:cubicBezTo>
+                  <a:pt x="1091922" y="3664827"/>
+                  <a:pt x="1136927" y="3669474"/>
+                  <a:pt x="1164431" y="3672346"/>
+                </a:cubicBezTo>
+                <a:cubicBezTo>
+                  <a:pt x="1191934" y="3675218"/>
+                  <a:pt x="1223010" y="3681077"/>
+                  <a:pt x="1233487" y="3685366"/>
+                </a:cubicBezTo>
+                <a:cubicBezTo>
+                  <a:pt x="1243965" y="3689654"/>
+                  <a:pt x="1271825" y="3698217"/>
+                  <a:pt x="1295400" y="3704393"/>
+                </a:cubicBezTo>
+                <a:cubicBezTo>
+                  <a:pt x="1397750" y="3731209"/>
+                  <a:pt x="1466850" y="3755517"/>
+                  <a:pt x="1466850" y="3764705"/>
+                </a:cubicBezTo>
+                <a:cubicBezTo>
+                  <a:pt x="1466850" y="3768662"/>
+                  <a:pt x="1474897" y="3771900"/>
+                  <a:pt x="1484733" y="3771900"/>
+                </a:cubicBezTo>
+                <a:cubicBezTo>
+                  <a:pt x="1494569" y="3771900"/>
+                  <a:pt x="1507953" y="3778329"/>
+                  <a:pt x="1514475" y="3786187"/>
+                </a:cubicBezTo>
+                <a:cubicBezTo>
+                  <a:pt x="1520996" y="3794045"/>
+                  <a:pt x="1531747" y="3800475"/>
+                  <a:pt x="1538365" y="3800475"/>
+                </a:cubicBezTo>
+                <a:cubicBezTo>
+                  <a:pt x="1552867" y="3800475"/>
+                  <a:pt x="1581060" y="3815241"/>
+                  <a:pt x="1638300" y="3852817"/>
+                </a:cubicBezTo>
+                <a:cubicBezTo>
+                  <a:pt x="1818843" y="3971339"/>
+                  <a:pt x="1929361" y="4163435"/>
+                  <a:pt x="1876556" y="4266941"/>
+                </a:cubicBezTo>
+                <a:cubicBezTo>
+                  <a:pt x="1866006" y="4287621"/>
+                  <a:pt x="1857375" y="4312680"/>
+                  <a:pt x="1857375" y="4322629"/>
+                </a:cubicBezTo>
+                <a:cubicBezTo>
+                  <a:pt x="1857375" y="4332578"/>
+                  <a:pt x="1840230" y="4360195"/>
+                  <a:pt x="1819275" y="4384001"/>
+                </a:cubicBezTo>
+                <a:cubicBezTo>
+                  <a:pt x="1798320" y="4407807"/>
+                  <a:pt x="1781175" y="4429842"/>
+                  <a:pt x="1781175" y="4432967"/>
+                </a:cubicBezTo>
+                <a:cubicBezTo>
+                  <a:pt x="1781175" y="4436093"/>
+                  <a:pt x="1813502" y="4438650"/>
+                  <a:pt x="1853014" y="4438650"/>
+                </a:cubicBezTo>
+                <a:cubicBezTo>
+                  <a:pt x="1896554" y="4438650"/>
+                  <a:pt x="1930454" y="4443340"/>
+                  <a:pt x="1939070" y="4450556"/>
+                </a:cubicBezTo>
+                <a:cubicBezTo>
+                  <a:pt x="1976480" y="4481888"/>
+                  <a:pt x="1981199" y="4490053"/>
+                  <a:pt x="1981200" y="4523445"/>
+                </a:cubicBezTo>
+                <a:cubicBezTo>
+                  <a:pt x="1981200" y="4551996"/>
+                  <a:pt x="1986079" y="4561867"/>
+                  <a:pt x="2005269" y="4572137"/>
+                </a:cubicBezTo>
+                <a:cubicBezTo>
+                  <a:pt x="2037470" y="4589371"/>
+                  <a:pt x="2041025" y="4609783"/>
+                  <a:pt x="2028466" y="4705350"/>
+                </a:cubicBezTo>
+                <a:cubicBezTo>
+                  <a:pt x="2022615" y="4749879"/>
+                  <a:pt x="2014723" y="4809886"/>
+                  <a:pt x="2010928" y="4838700"/>
+                </a:cubicBezTo>
+                <a:cubicBezTo>
+                  <a:pt x="1994881" y="4960558"/>
+                  <a:pt x="1889405" y="5162276"/>
+                  <a:pt x="1777078" y="5285925"/>
+                </a:cubicBezTo>
+                <a:cubicBezTo>
+                  <a:pt x="1755438" y="5309747"/>
+                  <a:pt x="1731980" y="5336738"/>
+                  <a:pt x="1724949" y="5345906"/>
+                </a:cubicBezTo>
+                <a:cubicBezTo>
+                  <a:pt x="1703147" y="5374336"/>
+                  <a:pt x="1733832" y="5366389"/>
+                  <a:pt x="1771650" y="5333811"/>
+                </a:cubicBezTo>
+                <a:cubicBezTo>
+                  <a:pt x="1799360" y="5309939"/>
+                  <a:pt x="1876465" y="5259684"/>
+                  <a:pt x="1954035" y="5214937"/>
+                </a:cubicBezTo>
+                <a:cubicBezTo>
+                  <a:pt x="2044678" y="5162648"/>
+                  <a:pt x="2166665" y="5095875"/>
+                  <a:pt x="2171547" y="5095875"/>
+                </a:cubicBezTo>
+                <a:cubicBezTo>
+                  <a:pt x="2174909" y="5095875"/>
+                  <a:pt x="2198821" y="5085886"/>
+                  <a:pt x="2224686" y="5073678"/>
+                </a:cubicBezTo>
+                <a:cubicBezTo>
+                  <a:pt x="2250550" y="5061470"/>
+                  <a:pt x="2297430" y="5043736"/>
+                  <a:pt x="2328862" y="5034268"/>
+                </a:cubicBezTo>
+                <a:cubicBezTo>
+                  <a:pt x="2360295" y="5024801"/>
+                  <a:pt x="2390298" y="5013896"/>
+                  <a:pt x="2395537" y="5010036"/>
+                </a:cubicBezTo>
+                <a:cubicBezTo>
+                  <a:pt x="2405775" y="5002493"/>
+                  <a:pt x="2435093" y="4996180"/>
+                  <a:pt x="2535850" y="4979824"/>
+                </a:cubicBezTo>
+                <a:cubicBezTo>
+                  <a:pt x="2607112" y="4968257"/>
+                  <a:pt x="2628900" y="4976360"/>
+                  <a:pt x="2628900" y="5014430"/>
+                </a:cubicBezTo>
+                <a:cubicBezTo>
+                  <a:pt x="2628900" y="5033558"/>
+                  <a:pt x="2632928" y="5035156"/>
+                  <a:pt x="2674143" y="5032377"/>
+                </a:cubicBezTo>
+                <a:cubicBezTo>
+                  <a:pt x="2699027" y="5030699"/>
+                  <a:pt x="2755075" y="5027685"/>
+                  <a:pt x="2798694" y="5025679"/>
+                </a:cubicBezTo>
+                <a:cubicBezTo>
+                  <a:pt x="2842313" y="5023673"/>
+                  <a:pt x="2882819" y="5017215"/>
+                  <a:pt x="2888706" y="5011328"/>
+                </a:cubicBezTo>
+                <a:cubicBezTo>
+                  <a:pt x="2894593" y="5005441"/>
+                  <a:pt x="2904558" y="5000625"/>
+                  <a:pt x="2910851" y="5000625"/>
+                </a:cubicBezTo>
+                <a:cubicBezTo>
+                  <a:pt x="2926077" y="5000625"/>
+                  <a:pt x="2962259" y="5062928"/>
+                  <a:pt x="2962333" y="5089275"/>
+                </a:cubicBezTo>
+                <a:cubicBezTo>
+                  <a:pt x="2962365" y="5100763"/>
+                  <a:pt x="2968795" y="5122439"/>
+                  <a:pt x="2976621" y="5137445"/>
+                </a:cubicBezTo>
+                <a:cubicBezTo>
+                  <a:pt x="2984447" y="5152450"/>
+                  <a:pt x="2990850" y="5170879"/>
+                  <a:pt x="2990850" y="5178399"/>
+                </a:cubicBezTo>
+                <a:cubicBezTo>
+                  <a:pt x="2990850" y="5205244"/>
+                  <a:pt x="3019147" y="5246140"/>
+                  <a:pt x="3041626" y="5251782"/>
+                </a:cubicBezTo>
+                <a:cubicBezTo>
+                  <a:pt x="3071210" y="5259207"/>
+                  <a:pt x="3124581" y="5367979"/>
+                  <a:pt x="3147399" y="5467350"/>
+                </a:cubicBezTo>
+                <a:cubicBezTo>
+                  <a:pt x="3156420" y="5506640"/>
+                  <a:pt x="3167630" y="5551646"/>
+                  <a:pt x="3172308" y="5567362"/>
+                </a:cubicBezTo>
+                <a:cubicBezTo>
+                  <a:pt x="3176987" y="5583078"/>
+                  <a:pt x="3183694" y="5627012"/>
+                  <a:pt x="3187212" y="5664993"/>
+                </a:cubicBezTo>
+                <a:cubicBezTo>
+                  <a:pt x="3190731" y="5702974"/>
+                  <a:pt x="3196291" y="5734050"/>
+                  <a:pt x="3199569" y="5734050"/>
+                </a:cubicBezTo>
+                <a:cubicBezTo>
+                  <a:pt x="3202846" y="5734050"/>
+                  <a:pt x="3219156" y="5709404"/>
+                  <a:pt x="3235814" y="5679281"/>
+                </a:cubicBezTo>
+                <a:cubicBezTo>
+                  <a:pt x="3270446" y="5616655"/>
+                  <a:pt x="3295665" y="5588000"/>
+                  <a:pt x="3379241" y="5516313"/>
+                </a:cubicBezTo>
+                <a:lnTo>
+                  <a:pt x="3438755" y="5465265"/>
+                </a:lnTo>
+                <a:lnTo>
+                  <a:pt x="3471342" y="5490120"/>
+                </a:lnTo>
+                <a:cubicBezTo>
+                  <a:pt x="3489265" y="5503790"/>
+                  <a:pt x="3511715" y="5515070"/>
+                  <a:pt x="3521233" y="5515186"/>
+                </a:cubicBezTo>
+                <a:cubicBezTo>
+                  <a:pt x="3544623" y="5515473"/>
+                  <a:pt x="3576174" y="5542183"/>
+                  <a:pt x="3594115" y="5576887"/>
+                </a:cubicBezTo>
+                <a:cubicBezTo>
+                  <a:pt x="3602240" y="5592603"/>
+                  <a:pt x="3622265" y="5620464"/>
+                  <a:pt x="3638615" y="5638800"/>
+                </a:cubicBezTo>
+                <a:cubicBezTo>
+                  <a:pt x="3706894" y="5715369"/>
+                  <a:pt x="3777068" y="5836008"/>
+                  <a:pt x="3810372" y="5934075"/>
+                </a:cubicBezTo>
+                <a:cubicBezTo>
+                  <a:pt x="3821936" y="5968126"/>
+                  <a:pt x="3835156" y="6000059"/>
+                  <a:pt x="3839749" y="6005036"/>
+                </a:cubicBezTo>
+                <a:cubicBezTo>
+                  <a:pt x="3844342" y="6010013"/>
+                  <a:pt x="3848100" y="6023943"/>
+                  <a:pt x="3848100" y="6035992"/>
+                </a:cubicBezTo>
+                <a:cubicBezTo>
+                  <a:pt x="3848100" y="6048041"/>
+                  <a:pt x="3851979" y="6057900"/>
+                  <a:pt x="3856721" y="6057900"/>
+                </a:cubicBezTo>
+                <a:cubicBezTo>
+                  <a:pt x="3861495" y="6057900"/>
+                  <a:pt x="3863006" y="6032123"/>
+                  <a:pt x="3860106" y="6000149"/>
+                </a:cubicBezTo>
+                <a:close/>
+                <a:moveTo>
+                  <a:pt x="5233987" y="5510507"/>
+                </a:moveTo>
+                <a:cubicBezTo>
+                  <a:pt x="5203717" y="5485696"/>
+                  <a:pt x="5191125" y="5481070"/>
+                  <a:pt x="5191125" y="5494763"/>
+                </a:cubicBezTo>
+                <a:cubicBezTo>
+                  <a:pt x="5191125" y="5506150"/>
+                  <a:pt x="5230640" y="5532919"/>
+                  <a:pt x="5248275" y="5533478"/>
+                </a:cubicBezTo>
+                <a:cubicBezTo>
+                  <a:pt x="5256818" y="5533748"/>
+                  <a:pt x="5251074" y="5524513"/>
+                  <a:pt x="5233987" y="5510507"/>
+                </a:cubicBezTo>
+                <a:close/>
+                <a:moveTo>
+                  <a:pt x="2881709" y="5167194"/>
+                </a:moveTo>
+                <a:cubicBezTo>
+                  <a:pt x="2876350" y="5124299"/>
+                  <a:pt x="2871916" y="5114462"/>
+                  <a:pt x="2859126" y="5117098"/>
+                </a:cubicBezTo>
+                <a:cubicBezTo>
+                  <a:pt x="2838467" y="5121355"/>
+                  <a:pt x="2839903" y="5174888"/>
+                  <a:pt x="2861249" y="5196235"/>
+                </a:cubicBezTo>
+                <a:cubicBezTo>
+                  <a:pt x="2869664" y="5204650"/>
+                  <a:pt x="2876550" y="5216230"/>
+                  <a:pt x="2876550" y="5221967"/>
+                </a:cubicBezTo>
+                <a:cubicBezTo>
+                  <a:pt x="2876550" y="5227705"/>
+                  <a:pt x="2879211" y="5229738"/>
+                  <a:pt x="2882464" y="5226485"/>
+                </a:cubicBezTo>
+                <a:cubicBezTo>
+                  <a:pt x="2885717" y="5223232"/>
+                  <a:pt x="2885377" y="5196551"/>
+                  <a:pt x="2881709" y="5167194"/>
+                </a:cubicBezTo>
+                <a:close/>
+                <a:moveTo>
+                  <a:pt x="8162925" y="4772025"/>
+                </a:moveTo>
+                <a:cubicBezTo>
+                  <a:pt x="8155681" y="4758490"/>
+                  <a:pt x="8155681" y="4747459"/>
+                  <a:pt x="8162925" y="4733925"/>
+                </a:cubicBezTo>
+                <a:cubicBezTo>
+                  <a:pt x="8179188" y="4703537"/>
+                  <a:pt x="8191500" y="4711745"/>
+                  <a:pt x="8191500" y="4752975"/>
+                </a:cubicBezTo>
+                <a:cubicBezTo>
+                  <a:pt x="8191500" y="4794204"/>
+                  <a:pt x="8179188" y="4802412"/>
+                  <a:pt x="8162925" y="4772025"/>
+                </a:cubicBezTo>
+                <a:close/>
+                <a:moveTo>
+                  <a:pt x="5276704" y="4465637"/>
+                </a:moveTo>
+                <a:cubicBezTo>
+                  <a:pt x="5276784" y="4451667"/>
+                  <a:pt x="5281907" y="4438551"/>
+                  <a:pt x="5288088" y="4436491"/>
+                </a:cubicBezTo>
+                <a:cubicBezTo>
+                  <a:pt x="5301261" y="4432100"/>
+                  <a:pt x="5291657" y="4400550"/>
+                  <a:pt x="5277148" y="4400550"/>
+                </a:cubicBezTo>
+                <a:cubicBezTo>
+                  <a:pt x="5271745" y="4400550"/>
+                  <a:pt x="5267325" y="4411012"/>
+                  <a:pt x="5267325" y="4423800"/>
+                </a:cubicBezTo>
+                <a:cubicBezTo>
+                  <a:pt x="5267325" y="4436588"/>
+                  <a:pt x="5263038" y="4449699"/>
+                  <a:pt x="5257800" y="4452937"/>
+                </a:cubicBezTo>
+                <a:cubicBezTo>
+                  <a:pt x="5247021" y="4459599"/>
+                  <a:pt x="5244889" y="4498764"/>
+                  <a:pt x="5254768" y="4508643"/>
+                </a:cubicBezTo>
+                <a:cubicBezTo>
+                  <a:pt x="5264431" y="4518306"/>
+                  <a:pt x="5276538" y="4494570"/>
+                  <a:pt x="5276704" y="4465637"/>
+                </a:cubicBezTo>
+                <a:close/>
+                <a:moveTo>
+                  <a:pt x="5419725" y="4202963"/>
+                </a:moveTo>
+                <a:cubicBezTo>
+                  <a:pt x="5419725" y="4196155"/>
+                  <a:pt x="5443299" y="4167011"/>
+                  <a:pt x="5472112" y="4138198"/>
+                </a:cubicBezTo>
+                <a:cubicBezTo>
+                  <a:pt x="5500925" y="4109385"/>
+                  <a:pt x="5524500" y="4077925"/>
+                  <a:pt x="5524500" y="4068288"/>
+                </a:cubicBezTo>
+                <a:cubicBezTo>
+                  <a:pt x="5524500" y="4054734"/>
+                  <a:pt x="5529892" y="4051797"/>
+                  <a:pt x="5548312" y="4055318"/>
+                </a:cubicBezTo>
+                <a:cubicBezTo>
+                  <a:pt x="5565346" y="4058574"/>
+                  <a:pt x="5572125" y="4055709"/>
+                  <a:pt x="5572125" y="4045251"/>
+                </a:cubicBezTo>
+                <a:cubicBezTo>
+                  <a:pt x="5572125" y="4037211"/>
+                  <a:pt x="5574726" y="4023853"/>
+                  <a:pt x="5577906" y="4015566"/>
+                </a:cubicBezTo>
+                <a:cubicBezTo>
+                  <a:pt x="5586264" y="3993786"/>
+                  <a:pt x="5559650" y="3996496"/>
+                  <a:pt x="5538787" y="4019550"/>
+                </a:cubicBezTo>
+                <a:cubicBezTo>
+                  <a:pt x="5529305" y="4030027"/>
+                  <a:pt x="5516069" y="4038600"/>
+                  <a:pt x="5509373" y="4038600"/>
+                </a:cubicBezTo>
+                <a:cubicBezTo>
+                  <a:pt x="5491687" y="4038600"/>
+                  <a:pt x="5429250" y="4118154"/>
+                  <a:pt x="5429250" y="4140690"/>
+                </a:cubicBezTo>
+                <a:cubicBezTo>
+                  <a:pt x="5429250" y="4151231"/>
+                  <a:pt x="5421267" y="4170078"/>
+                  <a:pt x="5411510" y="4182571"/>
+                </a:cubicBezTo>
+                <a:cubicBezTo>
+                  <a:pt x="5401753" y="4195065"/>
+                  <a:pt x="5390659" y="4215213"/>
+                  <a:pt x="5386857" y="4227345"/>
+                </a:cubicBezTo>
+                <a:cubicBezTo>
+                  <a:pt x="5380101" y="4248899"/>
+                  <a:pt x="5380397" y="4249014"/>
+                  <a:pt x="5399834" y="4232372"/>
+                </a:cubicBezTo>
+                <a:cubicBezTo>
+                  <a:pt x="5410774" y="4223005"/>
+                  <a:pt x="5419725" y="4209771"/>
+                  <a:pt x="5419725" y="4202963"/>
+                </a:cubicBezTo>
+                <a:close/>
+                <a:moveTo>
+                  <a:pt x="5575026" y="3082434"/>
+                </a:moveTo>
+                <a:cubicBezTo>
+                  <a:pt x="5605697" y="3054340"/>
+                  <a:pt x="5623107" y="3009900"/>
+                  <a:pt x="5603441" y="3009900"/>
+                </a:cubicBezTo>
+                <a:cubicBezTo>
+                  <a:pt x="5591322" y="3009900"/>
+                  <a:pt x="5514975" y="3089703"/>
+                  <a:pt x="5514975" y="3102370"/>
+                </a:cubicBezTo>
+                <a:cubicBezTo>
+                  <a:pt x="5514975" y="3123668"/>
+                  <a:pt x="5538555" y="3115839"/>
+                  <a:pt x="5575026" y="3082434"/>
+                </a:cubicBezTo>
+                <a:close/>
+              </a:path>
+            </a:pathLst>
+          </a:custGeom>
+          <a:solidFill>
+            <a:srgbClr val="CEACD6"/>
+          </a:solidFill>
+          <a:ln>
+            <a:noFill/>
+          </a:ln>
+        </p:spPr>
+      </p:sp>
       <p:pic>
         <p:nvPicPr>
-          <p:cNvPr id="3" name="burst" descr="024.png"/>
+          <p:cNvPr id="4" name="round paper" descr="018.png"/>
           <p:cNvPicPr>
             <a:picLocks noChangeAspect="1"/>
           </p:cNvPicPr>
@@ -4971,30 +9118,6 @@
         </p:nvPicPr>
         <p:blipFill>
           <a:blip r:embed="rId3"/>
-          <a:stretch>
-            <a:fillRect/>
-          </a:stretch>
-        </p:blipFill>
-        <p:spPr>
-          <a:xfrm>
-            <a:off x="1047750" y="2900362"/>
-            <a:ext cx="8191500" cy="7153275"/>
-          </a:xfrm>
-          <a:prstGeom prst="rect">
-            <a:avLst/>
-          </a:prstGeom>
-        </p:spPr>
-      </p:pic>
-      <p:pic>
-        <p:nvPicPr>
-          <p:cNvPr id="4" name="round paper" descr="025.png"/>
-          <p:cNvPicPr>
-            <a:picLocks noChangeAspect="1"/>
-          </p:cNvPicPr>
-          <p:nvPr/>
-        </p:nvPicPr>
-        <p:blipFill>
-          <a:blip r:embed="rId4"/>
           <a:stretch>
             <a:fillRect/>
           </a:stretch>
@@ -5009,9 +9132,34 @@
           </a:prstGeom>
         </p:spPr>
       </p:pic>
+      <p:sp>
+        <p:nvSpPr>
+          <p:cNvPr id="5" name="PHOTO: Favourite 3"/>
+          <p:cNvSpPr/>
+          <p:nvPr/>
+        </p:nvSpPr>
+        <p:spPr>
+          <a:xfrm rot="0">
+            <a:off x="2286000" y="3619500"/>
+            <a:ext cx="5715000" cy="5715000"/>
+          </a:xfrm>
+          <a:prstGeom prst="ellipse">
+            <a:avLst/>
+          </a:prstGeom>
+          <a:blipFill rotWithShape="1">
+            <a:blip r:embed="rId4"/>
+            <a:stretch>
+              <a:fillRect/>
+            </a:stretch>
+          </a:blipFill>
+          <a:ln>
+            <a:noFill/>
+          </a:ln>
+        </p:spPr>
+      </p:sp>
       <p:pic>
         <p:nvPicPr>
-          <p:cNvPr id="5" name="PHOTO: Favourite 3" descr="026.png"/>
+          <p:cNvPr id="6" name="bat" descr="002.png"/>
           <p:cNvPicPr>
             <a:picLocks noChangeAspect="1"/>
           </p:cNvPicPr>
@@ -5019,30 +9167,6 @@
         </p:nvPicPr>
         <p:blipFill>
           <a:blip r:embed="rId5"/>
-          <a:stretch>
-            <a:fillRect/>
-          </a:stretch>
-        </p:blipFill>
-        <p:spPr>
-          <a:xfrm>
-            <a:off x="2286000" y="3619500"/>
-            <a:ext cx="5715000" cy="5715000"/>
-          </a:xfrm>
-          <a:prstGeom prst="ellipse">
-            <a:avLst/>
-          </a:prstGeom>
-        </p:spPr>
-      </p:pic>
-      <p:pic>
-        <p:nvPicPr>
-          <p:cNvPr id="6" name="bat" descr="003.png"/>
-          <p:cNvPicPr>
-            <a:picLocks noChangeAspect="1"/>
-          </p:cNvPicPr>
-          <p:nvPr/>
-        </p:nvPicPr>
-        <p:blipFill>
-          <a:blip r:embed="rId6"/>
           <a:stretch>
             <a:fillRect/>
           </a:stretch>
@@ -5059,14 +9183,14 @@
       </p:pic>
       <p:pic>
         <p:nvPicPr>
-          <p:cNvPr id="7" name="bat" descr="006.png"/>
+          <p:cNvPr id="7" name="bat" descr="005.png"/>
           <p:cNvPicPr>
             <a:picLocks noChangeAspect="1"/>
           </p:cNvPicPr>
           <p:nvPr/>
         </p:nvPicPr>
         <p:blipFill>
-          <a:blip r:embed="rId7"/>
+          <a:blip r:embed="rId6"/>
           <a:stretch>
             <a:fillRect/>
           </a:stretch>
@@ -5083,14 +9207,14 @@
       </p:pic>
       <p:pic>
         <p:nvPicPr>
-          <p:cNvPr id="8" name="3" descr="029.png"/>
+          <p:cNvPr id="8" name="3" descr="021.png"/>
           <p:cNvPicPr>
             <a:picLocks noChangeAspect="1"/>
           </p:cNvPicPr>
           <p:nvPr/>
         </p:nvPicPr>
         <p:blipFill>
-          <a:blip r:embed="rId8"/>
+          <a:blip r:embed="rId7"/>
           <a:stretch>
             <a:fillRect/>
           </a:stretch>
@@ -5107,14 +9231,14 @@
       </p:pic>
       <p:pic>
         <p:nvPicPr>
-          <p:cNvPr id="9" name="ticket stub" descr="018.png"/>
+          <p:cNvPr id="9" name="ticket stub" descr="014.png"/>
           <p:cNvPicPr>
             <a:picLocks noChangeAspect="1"/>
           </p:cNvPicPr>
           <p:nvPr/>
         </p:nvPicPr>
         <p:blipFill>
-          <a:blip r:embed="rId9"/>
+          <a:blip r:embed="rId8"/>
           <a:stretch>
             <a:fillRect/>
           </a:stretch>
@@ -5228,7 +9352,7 @@
       </p:pic>
       <p:pic>
         <p:nvPicPr>
-          <p:cNvPr id="3" name="branch" descr="010.png"/>
+          <p:cNvPr id="3" name="branch" descr="009.png"/>
           <p:cNvPicPr>
             <a:picLocks noChangeAspect="1"/>
           </p:cNvPicPr>
@@ -5252,7 +9376,7 @@
       </p:pic>
       <p:pic>
         <p:nvPicPr>
-          <p:cNvPr id="4" name="hanging bat" descr="011.png"/>
+          <p:cNvPr id="4" name="hanging bat" descr="010.png"/>
           <p:cNvPicPr>
             <a:picLocks noChangeAspect="1"/>
           </p:cNvPicPr>
@@ -5276,7 +9400,7 @@
       </p:pic>
       <p:pic>
         <p:nvPicPr>
-          <p:cNvPr id="5" name="photo border" descr="033.png"/>
+          <p:cNvPr id="5" name="photo border" descr="025.png"/>
           <p:cNvPicPr>
             <a:picLocks noChangeAspect="1"/>
           </p:cNvPicPr>
@@ -5298,33 +9422,34 @@
           </a:prstGeom>
         </p:spPr>
       </p:pic>
-      <p:pic>
-        <p:nvPicPr>
-          <p:cNvPr id="6" name="PHOTO: Favourite 1" descr="034.png"/>
-          <p:cNvPicPr>
-            <a:picLocks noChangeAspect="1"/>
-          </p:cNvPicPr>
+      <p:sp>
+        <p:nvSpPr>
+          <p:cNvPr id="6" name="PHOTO: Favourite 1"/>
+          <p:cNvSpPr/>
           <p:nvPr/>
-        </p:nvPicPr>
-        <p:blipFill>
-          <a:blip r:embed="rId6"/>
-          <a:stretch>
-            <a:fillRect/>
-          </a:stretch>
-        </p:blipFill>
+        </p:nvSpPr>
         <p:spPr>
-          <a:xfrm rot="180000">
+          <a:xfrm rot="-180000">
             <a:off x="857250" y="4524375"/>
             <a:ext cx="2476500" cy="3143250"/>
           </a:xfrm>
           <a:prstGeom prst="rect">
             <a:avLst/>
           </a:prstGeom>
+          <a:blipFill rotWithShape="1">
+            <a:blip r:embed="rId6"/>
+            <a:stretch>
+              <a:fillRect/>
+            </a:stretch>
+          </a:blipFill>
+          <a:ln>
+            <a:noFill/>
+          </a:ln>
         </p:spPr>
-      </p:pic>
+      </p:sp>
       <p:pic>
         <p:nvPicPr>
-          <p:cNvPr id="7" name="hanging bat" descr="011.png"/>
+          <p:cNvPr id="7" name="hanging bat" descr="010.png"/>
           <p:cNvPicPr>
             <a:picLocks noChangeAspect="1"/>
           </p:cNvPicPr>
@@ -5348,7 +9473,7 @@
       </p:pic>
       <p:pic>
         <p:nvPicPr>
-          <p:cNvPr id="8" name="photo border" descr="033.png"/>
+          <p:cNvPr id="8" name="photo border" descr="025.png"/>
           <p:cNvPicPr>
             <a:picLocks noChangeAspect="1"/>
           </p:cNvPicPr>
@@ -5370,33 +9495,34 @@
           </a:prstGeom>
         </p:spPr>
       </p:pic>
-      <p:pic>
-        <p:nvPicPr>
-          <p:cNvPr id="9" name="PHOTO: Favourite 2" descr="034.png"/>
-          <p:cNvPicPr>
-            <a:picLocks noChangeAspect="1"/>
-          </p:cNvPicPr>
+      <p:sp>
+        <p:nvSpPr>
+          <p:cNvPr id="9" name="PHOTO: Favourite 2"/>
+          <p:cNvSpPr/>
           <p:nvPr/>
-        </p:nvPicPr>
-        <p:blipFill>
-          <a:blip r:embed="rId6"/>
-          <a:stretch>
-            <a:fillRect/>
-          </a:stretch>
-        </p:blipFill>
+        </p:nvSpPr>
         <p:spPr>
-          <a:xfrm rot="21480000">
+          <a:xfrm rot="120000">
             <a:off x="3905250" y="4524375"/>
             <a:ext cx="2476500" cy="3143250"/>
           </a:xfrm>
           <a:prstGeom prst="rect">
             <a:avLst/>
           </a:prstGeom>
+          <a:blipFill rotWithShape="1">
+            <a:blip r:embed="rId6"/>
+            <a:stretch>
+              <a:fillRect/>
+            </a:stretch>
+          </a:blipFill>
+          <a:ln>
+            <a:noFill/>
+          </a:ln>
         </p:spPr>
-      </p:pic>
+      </p:sp>
       <p:pic>
         <p:nvPicPr>
-          <p:cNvPr id="10" name="hanging bat" descr="011.png"/>
+          <p:cNvPr id="10" name="hanging bat" descr="010.png"/>
           <p:cNvPicPr>
             <a:picLocks noChangeAspect="1"/>
           </p:cNvPicPr>
@@ -5420,7 +9546,7 @@
       </p:pic>
       <p:pic>
         <p:nvPicPr>
-          <p:cNvPr id="11" name="photo border" descr="033.png"/>
+          <p:cNvPr id="11" name="photo border" descr="025.png"/>
           <p:cNvPicPr>
             <a:picLocks noChangeAspect="1"/>
           </p:cNvPicPr>
@@ -5442,30 +9568,31 @@
           </a:prstGeom>
         </p:spPr>
       </p:pic>
-      <p:pic>
-        <p:nvPicPr>
-          <p:cNvPr id="12" name="PHOTO: Favourite 3" descr="034.png"/>
-          <p:cNvPicPr>
-            <a:picLocks noChangeAspect="1"/>
-          </p:cNvPicPr>
+      <p:sp>
+        <p:nvSpPr>
+          <p:cNvPr id="12" name="PHOTO: Favourite 3"/>
+          <p:cNvSpPr/>
           <p:nvPr/>
-        </p:nvPicPr>
-        <p:blipFill>
-          <a:blip r:embed="rId6"/>
-          <a:stretch>
-            <a:fillRect/>
-          </a:stretch>
-        </p:blipFill>
+        </p:nvSpPr>
         <p:spPr>
-          <a:xfrm rot="120000">
+          <a:xfrm rot="-120000">
             <a:off x="6953250" y="4524375"/>
             <a:ext cx="2476500" cy="3143250"/>
           </a:xfrm>
           <a:prstGeom prst="rect">
             <a:avLst/>
           </a:prstGeom>
+          <a:blipFill rotWithShape="1">
+            <a:blip r:embed="rId6"/>
+            <a:stretch>
+              <a:fillRect/>
+            </a:stretch>
+          </a:blipFill>
+          <a:ln>
+            <a:noFill/>
+          </a:ln>
         </p:spPr>
-      </p:pic>
+      </p:sp>
       <p:sp>
         <p:nvSpPr>
           <p:cNvPr id="13" name="TEXT: comment"/>
@@ -5525,7 +9652,7 @@
       </p:sp>
       <p:pic>
         <p:nvPicPr>
-          <p:cNvPr id="14" name="BATTY" descr="041.png"/>
+          <p:cNvPr id="14" name="BATTY" descr="030.png"/>
           <p:cNvPicPr>
             <a:picLocks noChangeAspect="1"/>
           </p:cNvPicPr>

--- a/automation/reel-template-pack/halloween/h2-batty-about/carousel/Template h2 - Things I'm batty about - Carousel.pptx
+++ b/automation/reel-template-pack/halloween/h2-batty-about/carousel/Template h2 - Things I'm batty about - Carousel.pptx
@@ -4469,7 +4469,7 @@
           <p:nvPr/>
         </p:nvSpPr>
         <p:spPr>
-          <a:xfrm rot="-120000">
+          <a:xfrm rot="120000">
             <a:off x="6048375" y="12082462"/>
             <a:ext cx="1619250" cy="504825"/>
           </a:xfrm>
@@ -4681,7 +4681,7 @@
           <p:nvPr/>
         </p:nvSpPr>
         <p:spPr>
-          <a:xfrm rot="-120000">
+          <a:xfrm rot="120000">
             <a:off x="1714500" y="2571750"/>
             <a:ext cx="7239000" cy="8191500"/>
           </a:xfrm>
@@ -4730,7 +4730,7 @@
           <p:nvPr/>
         </p:nvSpPr>
         <p:spPr>
-          <a:xfrm rot="600000">
+          <a:xfrm rot="-600000">
             <a:off x="7429500" y="1433512"/>
             <a:ext cx="1905000" cy="1895475"/>
           </a:xfrm>
@@ -5804,7 +5804,7 @@
           <p:nvPr/>
         </p:nvSpPr>
         <p:spPr>
-          <a:xfrm rot="-480000">
+          <a:xfrm rot="480000">
             <a:off x="7810500" y="8977312"/>
             <a:ext cx="1524000" cy="1476375"/>
           </a:xfrm>
@@ -9429,7 +9429,7 @@
           <p:nvPr/>
         </p:nvSpPr>
         <p:spPr>
-          <a:xfrm rot="-180000">
+          <a:xfrm rot="180000">
             <a:off x="857250" y="4524375"/>
             <a:ext cx="2476500" cy="3143250"/>
           </a:xfrm>
@@ -9502,7 +9502,7 @@
           <p:nvPr/>
         </p:nvSpPr>
         <p:spPr>
-          <a:xfrm rot="120000">
+          <a:xfrm rot="-120000">
             <a:off x="3905250" y="4524375"/>
             <a:ext cx="2476500" cy="3143250"/>
           </a:xfrm>
@@ -9575,7 +9575,7 @@
           <p:nvPr/>
         </p:nvSpPr>
         <p:spPr>
-          <a:xfrm rot="-120000">
+          <a:xfrm rot="120000">
             <a:off x="6953250" y="4524375"/>
             <a:ext cx="2476500" cy="3143250"/>
           </a:xfrm>
